--- a/Clase_1/PPT/clase_1.pptx
+++ b/Clase_1/PPT/clase_1.pptx
@@ -4,6 +4,9 @@
   <p:sldMasterIdLst>
     <p:sldMasterId id="2147483648" r:id="rId1"/>
   </p:sldMasterIdLst>
+  <p:notesMasterIdLst>
+    <p:notesMasterId r:id="rId15"/>
+  </p:notesMasterIdLst>
   <p:sldIdLst>
     <p:sldId id="256" r:id="rId2"/>
     <p:sldId id="257" r:id="rId3"/>
@@ -19,10 +22,7 @@
     <p:sldId id="267" r:id="rId13"/>
     <p:sldId id="268" r:id="rId14"/>
   </p:sldIdLst>
-  <p:notesMasterIdLst>
-    <p:notesMasterId r:id="rId15"/>
-  </p:notesMasterIdLst>
-  <p:sldSz cx="9144000" cy="5143500"/>
+  <p:sldSz cx="9144000" cy="5143500" type="screen16x9"/>
   <p:notesSz cx="5143500" cy="9144000"/>
   <p:defaultTextStyle>
     <a:lvl1pPr marL="0" algn="l" defTabSz="914400" rtl="0" eaLnBrk="1" latinLnBrk="0" hangingPunct="1">
@@ -116,6 +116,11 @@
       </a:defRPr>
     </a:lvl9pPr>
   </p:defaultTextStyle>
+  <p:extLst>
+    <p:ext uri="{EFAFB233-063F-42B5-8137-9DF3F51BA10A}">
+      <p15:sldGuideLst xmlns:p15="http://schemas.microsoft.com/office/powerpoint/2012/main"/>
+    </p:ext>
+  </p:extLst>
 </p:presentation>
 </file>
 
@@ -141,234 +146,10 @@
           <a:chExt cx="0" cy="0"/>
         </a:xfrm>
       </p:grpSpPr>
-      <p:sp>
-        <p:nvSpPr>
-          <p:cNvPr id="2" name="Header Placeholder 1"/>
-          <p:cNvSpPr>
-            <a:spLocks noGrp="1"/>
-          </p:cNvSpPr>
-          <p:nvPr>
-            <p:ph type="hdr" sz="quarter"/>
-          </p:nvPr>
-        </p:nvSpPr>
-        <p:spPr>
-          <a:xfrm>
-            <a:off x="0" y="0"/>
-            <a:ext cx="2971800" cy="458788"/>
-          </a:xfrm>
-          <a:prstGeom prst="rect">
-            <a:avLst/>
-          </a:prstGeom>
-        </p:spPr>
-        <p:txBody>
-          <a:bodyPr vert="horz" lIns="91440" tIns="45720" rIns="91440" bIns="45720" rtlCol="0"/>
-          <a:lstStyle>
-            <a:lvl1pPr algn="l">
-              <a:defRPr sz="1200"/>
-            </a:lvl1pPr>
-          </a:lstStyle>
-          <a:p>
-            <a:endParaRPr lang="en-US"/>
-          </a:p>
-        </p:txBody>
-      </p:sp>
-      <p:sp>
-        <p:nvSpPr>
-          <p:cNvPr id="3" name="Date Placeholder 2"/>
-          <p:cNvSpPr>
-            <a:spLocks noGrp="1"/>
-          </p:cNvSpPr>
-          <p:nvPr>
-            <p:ph type="dt" idx="1"/>
-          </p:nvPr>
-        </p:nvSpPr>
-        <p:spPr>
-          <a:xfrm>
-            <a:off x="3884613" y="0"/>
-            <a:ext cx="2971800" cy="458788"/>
-          </a:xfrm>
-          <a:prstGeom prst="rect">
-            <a:avLst/>
-          </a:prstGeom>
-        </p:spPr>
-        <p:txBody>
-          <a:bodyPr vert="horz" lIns="91440" tIns="45720" rIns="91440" bIns="45720" rtlCol="0"/>
-          <a:lstStyle>
-            <a:lvl1pPr algn="r">
-              <a:defRPr sz="1200"/>
-            </a:lvl1pPr>
-          </a:lstStyle>
-          <a:p>
-            <a:fld id="{5282F153-3F37-0F45-9E97-73ACFA13230C}" type="datetimeFigureOut">
-              <a:rPr lang="en-US"/>
-              <a:t>7/23/19</a:t>
-            </a:fld>
-            <a:endParaRPr lang="en-US"/>
-          </a:p>
-        </p:txBody>
-      </p:sp>
-      <p:sp>
-        <p:nvSpPr>
-          <p:cNvPr id="4" name="Slide Image Placeholder 3"/>
-          <p:cNvSpPr>
-            <a:spLocks noGrp="1" noRot="1" noChangeAspect="1"/>
-          </p:cNvSpPr>
-          <p:nvPr>
-            <p:ph type="sldImg" idx="2"/>
-          </p:nvPr>
-        </p:nvSpPr>
-        <p:spPr>
-          <a:xfrm>
-            <a:off x="685800" y="1143000"/>
-            <a:ext cx="5486400" cy="3086100"/>
-          </a:xfrm>
-          <a:prstGeom prst="rect">
-            <a:avLst/>
-          </a:prstGeom>
-          <a:noFill/>
-          <a:ln w="12700">
-            <a:solidFill>
-              <a:prstClr val="black"/>
-            </a:solidFill>
-          </a:ln>
-        </p:spPr>
-        <p:txBody>
-          <a:bodyPr vert="horz" lIns="91440" tIns="45720" rIns="91440" bIns="45720" rtlCol="0" anchor="ctr"/>
-          <a:lstStyle/>
-          <a:p>
-            <a:endParaRPr lang="en-US"/>
-          </a:p>
-        </p:txBody>
-      </p:sp>
-      <p:sp>
-        <p:nvSpPr>
-          <p:cNvPr id="5" name="Notes Placeholder 4"/>
-          <p:cNvSpPr>
-            <a:spLocks noGrp="1"/>
-          </p:cNvSpPr>
-          <p:nvPr>
-            <p:ph type="body" sz="quarter" idx="3"/>
-          </p:nvPr>
-        </p:nvSpPr>
-        <p:spPr>
-          <a:xfrm>
-            <a:off x="685800" y="4400550"/>
-            <a:ext cx="5486400" cy="3600450"/>
-          </a:xfrm>
-          <a:prstGeom prst="rect">
-            <a:avLst/>
-          </a:prstGeom>
-        </p:spPr>
-        <p:txBody>
-          <a:bodyPr vert="horz" lIns="91440" tIns="45720" rIns="91440" bIns="45720" rtlCol="0"/>
-          <a:lstStyle/>
-          <a:p>
-            <a:pPr lvl="0"/>
-            <a:r>
-              <a:rPr lang="en-US"/>
-              <a:t>Click to edit Master text styles</a:t>
-            </a:r>
-          </a:p>
-          <a:p>
-            <a:pPr lvl="1"/>
-            <a:r>
-              <a:rPr lang="en-US"/>
-              <a:t>Second level</a:t>
-            </a:r>
-          </a:p>
-          <a:p>
-            <a:pPr lvl="2"/>
-            <a:r>
-              <a:rPr lang="en-US"/>
-              <a:t>Third level</a:t>
-            </a:r>
-          </a:p>
-          <a:p>
-            <a:pPr lvl="3"/>
-            <a:r>
-              <a:rPr lang="en-US"/>
-              <a:t>Fourth level</a:t>
-            </a:r>
-          </a:p>
-          <a:p>
-            <a:pPr lvl="4"/>
-            <a:r>
-              <a:rPr lang="en-US"/>
-              <a:t>Fifth level</a:t>
-            </a:r>
-          </a:p>
-        </p:txBody>
-      </p:sp>
-      <p:sp>
-        <p:nvSpPr>
-          <p:cNvPr id="6" name="Footer Placeholder 5"/>
-          <p:cNvSpPr>
-            <a:spLocks noGrp="1"/>
-          </p:cNvSpPr>
-          <p:nvPr>
-            <p:ph type="ftr" sz="quarter" idx="4"/>
-          </p:nvPr>
-        </p:nvSpPr>
-        <p:spPr>
-          <a:xfrm>
-            <a:off x="0" y="8685213"/>
-            <a:ext cx="2971800" cy="458787"/>
-          </a:xfrm>
-          <a:prstGeom prst="rect">
-            <a:avLst/>
-          </a:prstGeom>
-        </p:spPr>
-        <p:txBody>
-          <a:bodyPr vert="horz" lIns="91440" tIns="45720" rIns="91440" bIns="45720" rtlCol="0" anchor="b"/>
-          <a:lstStyle>
-            <a:lvl1pPr algn="l">
-              <a:defRPr sz="1200"/>
-            </a:lvl1pPr>
-          </a:lstStyle>
-          <a:p>
-            <a:endParaRPr lang="en-US"/>
-          </a:p>
-        </p:txBody>
-      </p:sp>
-      <p:sp>
-        <p:nvSpPr>
-          <p:cNvPr id="7" name="Slide Number Placeholder 6"/>
-          <p:cNvSpPr>
-            <a:spLocks noGrp="1"/>
-          </p:cNvSpPr>
-          <p:nvPr>
-            <p:ph type="sldNum" sz="quarter" idx="5"/>
-          </p:nvPr>
-        </p:nvSpPr>
-        <p:spPr>
-          <a:xfrm>
-            <a:off x="3884613" y="8685213"/>
-            <a:ext cx="2971800" cy="458787"/>
-          </a:xfrm>
-          <a:prstGeom prst="rect">
-            <a:avLst/>
-          </a:prstGeom>
-        </p:spPr>
-        <p:txBody>
-          <a:bodyPr vert="horz" lIns="91440" tIns="45720" rIns="91440" bIns="45720" rtlCol="0" anchor="b"/>
-          <a:lstStyle>
-            <a:lvl1pPr algn="r">
-              <a:defRPr sz="1200"/>
-            </a:lvl1pPr>
-          </a:lstStyle>
-          <a:p>
-            <a:fld id="{CE5E9CC1-C706-0F49-92D6-E571CC5EEA8F}" type="slidenum">
-              <a:rPr lang="en-US"/>
-              <a:t>‹#›</a:t>
-            </a:fld>
-            <a:endParaRPr lang="en-US"/>
-          </a:p>
-        </p:txBody>
-      </p:sp>
     </p:spTree>
     <p:extLst>
       <p:ext uri="{BB962C8B-B14F-4D97-AF65-F5344CB8AC3E}">
-        <p14:creationId xmlns:p14="http://schemas.microsoft.com/office/powerpoint/2010/main" val="1024086991"/>
+        <p14:creationId xmlns:p14="http://schemas.microsoft.com/office/powerpoint/2010/main" val="2058291206"/>
       </p:ext>
     </p:extLst>
   </p:cSld>
@@ -512,10 +293,6 @@
           <a:bodyPr/>
           <a:lstStyle/>
           <a:p>
-            <a:r>
-              <a:rPr lang="en-US" dirty="0"/>
-              <a:t/>
-            </a:r>
             <a:endParaRPr lang="en-US" dirty="0"/>
           </a:p>
         </p:txBody>
@@ -600,10 +377,6 @@
           <a:bodyPr/>
           <a:lstStyle/>
           <a:p>
-            <a:r>
-              <a:rPr lang="en-US" dirty="0"/>
-              <a:t/>
-            </a:r>
             <a:endParaRPr lang="en-US" dirty="0"/>
           </a:p>
         </p:txBody>
@@ -688,10 +461,6 @@
           <a:bodyPr/>
           <a:lstStyle/>
           <a:p>
-            <a:r>
-              <a:rPr lang="en-US" dirty="0"/>
-              <a:t/>
-            </a:r>
             <a:endParaRPr lang="en-US" dirty="0"/>
           </a:p>
         </p:txBody>
@@ -776,10 +545,6 @@
           <a:bodyPr/>
           <a:lstStyle/>
           <a:p>
-            <a:r>
-              <a:rPr lang="en-US" dirty="0"/>
-              <a:t/>
-            </a:r>
             <a:endParaRPr lang="en-US" dirty="0"/>
           </a:p>
         </p:txBody>
@@ -864,10 +629,6 @@
           <a:bodyPr/>
           <a:lstStyle/>
           <a:p>
-            <a:r>
-              <a:rPr lang="en-US" dirty="0"/>
-              <a:t/>
-            </a:r>
             <a:endParaRPr lang="en-US" dirty="0"/>
           </a:p>
         </p:txBody>
@@ -952,10 +713,6 @@
           <a:bodyPr/>
           <a:lstStyle/>
           <a:p>
-            <a:r>
-              <a:rPr lang="en-US" dirty="0"/>
-              <a:t/>
-            </a:r>
             <a:endParaRPr lang="en-US" dirty="0"/>
           </a:p>
         </p:txBody>
@@ -1040,10 +797,6 @@
           <a:bodyPr/>
           <a:lstStyle/>
           <a:p>
-            <a:r>
-              <a:rPr lang="en-US" dirty="0"/>
-              <a:t/>
-            </a:r>
             <a:endParaRPr lang="en-US" dirty="0"/>
           </a:p>
         </p:txBody>
@@ -1128,10 +881,6 @@
           <a:bodyPr/>
           <a:lstStyle/>
           <a:p>
-            <a:r>
-              <a:rPr lang="en-US" dirty="0"/>
-              <a:t/>
-            </a:r>
             <a:endParaRPr lang="en-US" dirty="0"/>
           </a:p>
         </p:txBody>
@@ -1216,10 +965,6 @@
           <a:bodyPr/>
           <a:lstStyle/>
           <a:p>
-            <a:r>
-              <a:rPr lang="en-US" dirty="0"/>
-              <a:t/>
-            </a:r>
             <a:endParaRPr lang="en-US" dirty="0"/>
           </a:p>
         </p:txBody>
@@ -1304,10 +1049,6 @@
           <a:bodyPr/>
           <a:lstStyle/>
           <a:p>
-            <a:r>
-              <a:rPr lang="en-US" dirty="0"/>
-              <a:t/>
-            </a:r>
             <a:endParaRPr lang="en-US" dirty="0"/>
           </a:p>
         </p:txBody>
@@ -1392,10 +1133,6 @@
           <a:bodyPr/>
           <a:lstStyle/>
           <a:p>
-            <a:r>
-              <a:rPr lang="en-US" dirty="0"/>
-              <a:t/>
-            </a:r>
             <a:endParaRPr lang="en-US" dirty="0"/>
           </a:p>
         </p:txBody>
@@ -1480,10 +1217,6 @@
           <a:bodyPr/>
           <a:lstStyle/>
           <a:p>
-            <a:r>
-              <a:rPr lang="en-US" dirty="0"/>
-              <a:t/>
-            </a:r>
             <a:endParaRPr lang="en-US" dirty="0"/>
           </a:p>
         </p:txBody>
@@ -1568,10 +1301,6 @@
           <a:bodyPr/>
           <a:lstStyle/>
           <a:p>
-            <a:r>
-              <a:rPr lang="en-US" dirty="0"/>
-              <a:t/>
-            </a:r>
             <a:endParaRPr lang="en-US" dirty="0"/>
           </a:p>
         </p:txBody>
@@ -1645,6 +1374,11 @@
 <file path=ppt/slideMasters/slideMaster1.xml><?xml version="1.0" encoding="utf-8"?>
 <p:sldMaster xmlns:a="http://schemas.openxmlformats.org/drawingml/2006/main" xmlns:r="http://schemas.openxmlformats.org/officeDocument/2006/relationships" xmlns:p="http://schemas.openxmlformats.org/presentationml/2006/main">
   <p:cSld>
+    <p:bg>
+      <p:bgRef idx="1001">
+        <a:schemeClr val="bg1"/>
+      </p:bgRef>
+    </p:bg>
     <p:spTree>
       <p:nvGrpSpPr>
         <p:cNvPr id="1" name=""/>
@@ -1927,6 +1661,7 @@
         <a:solidFill>
           <a:srgbClr val="FFFFFF"/>
         </a:solidFill>
+        <a:effectLst/>
       </p:bgPr>
     </p:bg>
     <p:spTree>
@@ -2072,7 +1807,7 @@
           <a:bodyPr wrap="square" lIns="0" tIns="0" rIns="0" bIns="0" rtlCol="0" anchor="ctr"/>
           <a:lstStyle/>
           <a:p>
-            <a:pPr algn="ctr" indent="0" marL="0">
+            <a:pPr marL="0" indent="0" algn="ctr">
               <a:buNone/>
             </a:pPr>
             <a:r>
@@ -2138,11 +1873,11 @@
           <a:bodyPr wrap="square" lIns="0" tIns="0" rIns="0" bIns="0" rtlCol="0" anchor="ctr"/>
           <a:lstStyle/>
           <a:p>
-            <a:pPr indent="0" marL="0">
-              <a:buNone/>
-            </a:pPr>
-            <a:r>
-              <a:rPr lang="en-US" sz="750" b="1" spc="100" kern="0" dirty="0">
+            <a:pPr marL="0" indent="0">
+              <a:buNone/>
+            </a:pPr>
+            <a:r>
+              <a:rPr lang="en-US" sz="750" b="1" kern="0" spc="100" dirty="0">
                 <a:solidFill>
                   <a:srgbClr val="0F3D6E"/>
                 </a:solidFill>
@@ -2177,7 +1912,7 @@
           <a:bodyPr wrap="square" lIns="0" tIns="0" rIns="0" bIns="0" rtlCol="0" anchor="ctr"/>
           <a:lstStyle/>
           <a:p>
-            <a:pPr indent="0" marL="0">
+            <a:pPr marL="0" indent="0">
               <a:lnSpc>
                 <a:spcPct val="110000"/>
               </a:lnSpc>
@@ -2197,7 +1932,7 @@
             <a:endParaRPr lang="en-US" sz="3800" dirty="0"/>
           </a:p>
           <a:p>
-            <a:pPr indent="0" marL="0">
+            <a:pPr marL="0" indent="0">
               <a:lnSpc>
                 <a:spcPct val="110000"/>
               </a:lnSpc>
@@ -2239,7 +1974,7 @@
           <a:bodyPr wrap="square" lIns="0" tIns="0" rIns="0" bIns="0" rtlCol="0" anchor="ctr"/>
           <a:lstStyle/>
           <a:p>
-            <a:pPr indent="0" marL="0">
+            <a:pPr marL="0" indent="0">
               <a:buNone/>
             </a:pPr>
             <a:r>
@@ -2301,7 +2036,7 @@
           <a:bodyPr wrap="square" lIns="0" tIns="0" rIns="0" bIns="0" rtlCol="0" anchor="ctr"/>
           <a:lstStyle/>
           <a:p>
-            <a:pPr indent="0" marL="0">
+            <a:pPr marL="0" indent="0">
               <a:buNone/>
             </a:pPr>
             <a:r>
@@ -2340,7 +2075,7 @@
           <a:bodyPr wrap="square" lIns="0" tIns="0" rIns="0" bIns="0" rtlCol="0" anchor="ctr"/>
           <a:lstStyle/>
           <a:p>
-            <a:pPr indent="0" marL="0">
+            <a:pPr marL="0" indent="0">
               <a:buNone/>
             </a:pPr>
             <a:r>
@@ -2379,7 +2114,7 @@
           <a:bodyPr wrap="square" lIns="0" tIns="0" rIns="0" bIns="0" rtlCol="0" anchor="ctr"/>
           <a:lstStyle/>
           <a:p>
-            <a:pPr indent="0" marL="0">
+            <a:pPr marL="0" indent="0">
               <a:buNone/>
             </a:pPr>
             <a:r>
@@ -2413,6 +2148,7 @@
         <a:solidFill>
           <a:srgbClr val="1A2B3C"/>
         </a:solidFill>
+        <a:effectLst/>
       </p:bgPr>
     </p:bg>
     <p:spTree>
@@ -2550,7 +2286,7 @@
           <a:bodyPr wrap="square" lIns="0" tIns="0" rIns="0" bIns="0" rtlCol="0" anchor="ctr"/>
           <a:lstStyle/>
           <a:p>
-            <a:pPr algn="ctr" indent="0" marL="0">
+            <a:pPr marL="0" indent="0" algn="ctr">
               <a:buNone/>
             </a:pPr>
             <a:r>
@@ -2639,7 +2375,7 @@
           <a:bodyPr wrap="square" lIns="0" tIns="0" rIns="0" bIns="0" rtlCol="0" anchor="ctr"/>
           <a:lstStyle/>
           <a:p>
-            <a:pPr indent="0" marL="0">
+            <a:pPr marL="0" indent="0">
               <a:buNone/>
             </a:pPr>
             <a:r>
@@ -2678,7 +2414,7 @@
           <a:bodyPr wrap="square" lIns="0" tIns="0" rIns="0" bIns="0" rtlCol="0" anchor="ctr"/>
           <a:lstStyle/>
           <a:p>
-            <a:pPr indent="0" marL="0">
+            <a:pPr marL="0" indent="0">
               <a:buNone/>
             </a:pPr>
             <a:r>
@@ -2717,7 +2453,7 @@
           <a:bodyPr wrap="square" lIns="0" tIns="0" rIns="0" bIns="0" rtlCol="0" anchor="ctr"/>
           <a:lstStyle/>
           <a:p>
-            <a:pPr indent="0" marL="0">
+            <a:pPr marL="0" indent="0">
               <a:buNone/>
             </a:pPr>
             <a:r>
@@ -2756,7 +2492,7 @@
           <a:bodyPr wrap="square" lIns="0" tIns="0" rIns="0" bIns="0" rtlCol="0" anchor="ctr"/>
           <a:lstStyle/>
           <a:p>
-            <a:pPr indent="0" marL="0">
+            <a:pPr marL="0" indent="0">
               <a:buNone/>
             </a:pPr>
             <a:r>
@@ -2795,7 +2531,7 @@
           <a:bodyPr wrap="square" lIns="0" tIns="0" rIns="0" bIns="0" rtlCol="0" anchor="ctr"/>
           <a:lstStyle/>
           <a:p>
-            <a:pPr indent="0" marL="0">
+            <a:pPr marL="0" indent="0">
               <a:buNone/>
             </a:pPr>
             <a:r>
@@ -2834,7 +2570,7 @@
           <a:bodyPr wrap="square" lIns="0" tIns="0" rIns="0" bIns="0" rtlCol="0" anchor="ctr"/>
           <a:lstStyle/>
           <a:p>
-            <a:pPr indent="0" marL="0">
+            <a:pPr marL="0" indent="0">
               <a:buNone/>
             </a:pPr>
             <a:r>
@@ -2873,7 +2609,7 @@
           <a:bodyPr wrap="square" lIns="0" tIns="0" rIns="0" bIns="0" rtlCol="0" anchor="ctr"/>
           <a:lstStyle/>
           <a:p>
-            <a:pPr indent="0" marL="0">
+            <a:pPr marL="0" indent="0">
               <a:buNone/>
             </a:pPr>
             <a:r>
@@ -2962,7 +2698,7 @@
           <a:bodyPr wrap="square" lIns="0" tIns="0" rIns="0" bIns="0" rtlCol="0" anchor="ctr"/>
           <a:lstStyle/>
           <a:p>
-            <a:pPr indent="0" marL="0">
+            <a:pPr marL="0" indent="0">
               <a:buNone/>
             </a:pPr>
             <a:r>
@@ -3001,7 +2737,7 @@
           <a:bodyPr wrap="square" lIns="0" tIns="0" rIns="0" bIns="0" rtlCol="0" anchor="ctr"/>
           <a:lstStyle/>
           <a:p>
-            <a:pPr indent="0" marL="0">
+            <a:pPr marL="0" indent="0">
               <a:buNone/>
             </a:pPr>
             <a:r>
@@ -3040,7 +2776,7 @@
           <a:bodyPr wrap="square" lIns="0" tIns="0" rIns="0" bIns="0" rtlCol="0" anchor="ctr"/>
           <a:lstStyle/>
           <a:p>
-            <a:pPr indent="0" marL="0">
+            <a:pPr marL="0" indent="0">
               <a:buNone/>
             </a:pPr>
             <a:r>
@@ -3079,7 +2815,7 @@
           <a:bodyPr wrap="square" lIns="0" tIns="0" rIns="0" bIns="0" rtlCol="0" anchor="ctr"/>
           <a:lstStyle/>
           <a:p>
-            <a:pPr indent="0" marL="0">
+            <a:pPr marL="0" indent="0">
               <a:buNone/>
             </a:pPr>
             <a:r>
@@ -3118,7 +2854,7 @@
           <a:bodyPr wrap="square" lIns="0" tIns="0" rIns="0" bIns="0" rtlCol="0" anchor="ctr"/>
           <a:lstStyle/>
           <a:p>
-            <a:pPr indent="0" marL="0">
+            <a:pPr marL="0" indent="0">
               <a:buNone/>
             </a:pPr>
             <a:r>
@@ -3157,7 +2893,7 @@
           <a:bodyPr wrap="square" lIns="0" tIns="0" rIns="0" bIns="0" rtlCol="0" anchor="ctr"/>
           <a:lstStyle/>
           <a:p>
-            <a:pPr indent="0" marL="0">
+            <a:pPr marL="0" indent="0">
               <a:buNone/>
             </a:pPr>
             <a:r>
@@ -3196,7 +2932,7 @@
           <a:bodyPr wrap="square" lIns="0" tIns="0" rIns="0" bIns="0" rtlCol="0" anchor="ctr"/>
           <a:lstStyle/>
           <a:p>
-            <a:pPr indent="0" marL="0">
+            <a:pPr marL="0" indent="0">
               <a:buNone/>
             </a:pPr>
             <a:r>
@@ -3285,7 +3021,7 @@
           <a:bodyPr wrap="square" lIns="0" tIns="0" rIns="0" bIns="0" rtlCol="0" anchor="ctr"/>
           <a:lstStyle/>
           <a:p>
-            <a:pPr indent="0" marL="0">
+            <a:pPr marL="0" indent="0">
               <a:buNone/>
             </a:pPr>
             <a:r>
@@ -3324,7 +3060,7 @@
           <a:bodyPr wrap="square" lIns="0" tIns="0" rIns="0" bIns="0" rtlCol="0" anchor="ctr"/>
           <a:lstStyle/>
           <a:p>
-            <a:pPr indent="0" marL="0">
+            <a:pPr marL="0" indent="0">
               <a:buNone/>
             </a:pPr>
             <a:r>
@@ -3363,7 +3099,7 @@
           <a:bodyPr wrap="square" lIns="0" tIns="0" rIns="0" bIns="0" rtlCol="0" anchor="ctr"/>
           <a:lstStyle/>
           <a:p>
-            <a:pPr indent="0" marL="0">
+            <a:pPr marL="0" indent="0">
               <a:buNone/>
             </a:pPr>
             <a:r>
@@ -3402,7 +3138,7 @@
           <a:bodyPr wrap="square" lIns="0" tIns="0" rIns="0" bIns="0" rtlCol="0" anchor="ctr"/>
           <a:lstStyle/>
           <a:p>
-            <a:pPr indent="0" marL="0">
+            <a:pPr marL="0" indent="0">
               <a:buNone/>
             </a:pPr>
             <a:r>
@@ -3441,7 +3177,7 @@
           <a:bodyPr wrap="square" lIns="0" tIns="0" rIns="0" bIns="0" rtlCol="0" anchor="ctr"/>
           <a:lstStyle/>
           <a:p>
-            <a:pPr indent="0" marL="0">
+            <a:pPr marL="0" indent="0">
               <a:buNone/>
             </a:pPr>
             <a:r>
@@ -3480,7 +3216,7 @@
           <a:bodyPr wrap="square" lIns="0" tIns="0" rIns="0" bIns="0" rtlCol="0" anchor="ctr"/>
           <a:lstStyle/>
           <a:p>
-            <a:pPr indent="0" marL="0">
+            <a:pPr marL="0" indent="0">
               <a:buNone/>
             </a:pPr>
             <a:r>
@@ -3519,7 +3255,7 @@
           <a:bodyPr wrap="square" lIns="0" tIns="0" rIns="0" bIns="0" rtlCol="0" anchor="ctr"/>
           <a:lstStyle/>
           <a:p>
-            <a:pPr indent="0" marL="0">
+            <a:pPr marL="0" indent="0">
               <a:buNone/>
             </a:pPr>
             <a:r>
@@ -3608,7 +3344,7 @@
           <a:bodyPr wrap="square" lIns="0" tIns="0" rIns="0" bIns="0" rtlCol="0" anchor="ctr"/>
           <a:lstStyle/>
           <a:p>
-            <a:pPr indent="0" marL="0">
+            <a:pPr marL="0" indent="0">
               <a:buNone/>
             </a:pPr>
             <a:r>
@@ -3647,7 +3383,7 @@
           <a:bodyPr wrap="square" lIns="0" tIns="0" rIns="0" bIns="0" rtlCol="0" anchor="ctr"/>
           <a:lstStyle/>
           <a:p>
-            <a:pPr indent="0" marL="0">
+            <a:pPr marL="0" indent="0">
               <a:buNone/>
             </a:pPr>
             <a:r>
@@ -3686,7 +3422,7 @@
           <a:bodyPr wrap="square" lIns="0" tIns="0" rIns="0" bIns="0" rtlCol="0" anchor="ctr"/>
           <a:lstStyle/>
           <a:p>
-            <a:pPr indent="0" marL="0">
+            <a:pPr marL="0" indent="0">
               <a:buNone/>
             </a:pPr>
             <a:r>
@@ -3725,7 +3461,7 @@
           <a:bodyPr wrap="square" lIns="0" tIns="0" rIns="0" bIns="0" rtlCol="0" anchor="ctr"/>
           <a:lstStyle/>
           <a:p>
-            <a:pPr indent="0" marL="0">
+            <a:pPr marL="0" indent="0">
               <a:buNone/>
             </a:pPr>
             <a:r>
@@ -3764,7 +3500,7 @@
           <a:bodyPr wrap="square" lIns="0" tIns="0" rIns="0" bIns="0" rtlCol="0" anchor="ctr"/>
           <a:lstStyle/>
           <a:p>
-            <a:pPr indent="0" marL="0">
+            <a:pPr marL="0" indent="0">
               <a:buNone/>
             </a:pPr>
             <a:r>
@@ -3803,7 +3539,7 @@
           <a:bodyPr wrap="square" lIns="0" tIns="0" rIns="0" bIns="0" rtlCol="0" anchor="ctr"/>
           <a:lstStyle/>
           <a:p>
-            <a:pPr indent="0" marL="0">
+            <a:pPr marL="0" indent="0">
               <a:buNone/>
             </a:pPr>
             <a:r>
@@ -3842,7 +3578,7 @@
           <a:bodyPr wrap="square" lIns="0" tIns="0" rIns="0" bIns="0" rtlCol="0" anchor="ctr"/>
           <a:lstStyle/>
           <a:p>
-            <a:pPr indent="0" marL="0">
+            <a:pPr marL="0" indent="0">
               <a:buNone/>
             </a:pPr>
             <a:r>
@@ -3881,7 +3617,7 @@
           <a:bodyPr wrap="square" lIns="0" tIns="0" rIns="0" bIns="0" rtlCol="0" anchor="ctr"/>
           <a:lstStyle/>
           <a:p>
-            <a:pPr indent="0" marL="0">
+            <a:pPr marL="0" indent="0">
               <a:buNone/>
             </a:pPr>
             <a:r>
@@ -3915,6 +3651,7 @@
         <a:solidFill>
           <a:srgbClr val="FFFFFF"/>
         </a:solidFill>
+        <a:effectLst/>
       </p:bgPr>
     </p:bg>
     <p:spTree>
@@ -3977,7 +3714,7 @@
           <a:bodyPr wrap="square" lIns="0" tIns="0" rIns="0" bIns="0" rtlCol="0" anchor="ctr"/>
           <a:lstStyle/>
           <a:p>
-            <a:pPr indent="0" marL="0">
+            <a:pPr marL="0" indent="0">
               <a:buNone/>
             </a:pPr>
             <a:r>
@@ -4016,7 +3753,7 @@
           <a:bodyPr wrap="square" lIns="0" tIns="0" rIns="0" bIns="0" rtlCol="0" anchor="ctr"/>
           <a:lstStyle/>
           <a:p>
-            <a:pPr indent="0" marL="0">
+            <a:pPr marL="0" indent="0">
               <a:buNone/>
             </a:pPr>
             <a:r>
@@ -4055,7 +3792,7 @@
           <a:bodyPr wrap="square" lIns="0" tIns="0" rIns="0" bIns="0" rtlCol="0" anchor="ctr"/>
           <a:lstStyle/>
           <a:p>
-            <a:pPr indent="0" marL="0">
+            <a:pPr marL="0" indent="0">
               <a:buNone/>
             </a:pPr>
             <a:r>
@@ -4097,7 +3834,7 @@
             <a:prstDash val="solid"/>
           </a:ln>
           <a:effectLst>
-            <a:outerShdw sx="100000" sy="100000" kx="0" ky="0" algn="bl" rotWithShape="0" blurRad="101600" dist="38100" dir="8100000">
+            <a:outerShdw blurRad="101600" dist="38100" dir="8100000" algn="bl" rotWithShape="0">
               <a:srgbClr val="9EAFC0">
                 <a:alpha val="14000"/>
               </a:srgbClr>
@@ -4151,7 +3888,7 @@
           <a:bodyPr wrap="square" lIns="0" tIns="0" rIns="0" bIns="0" rtlCol="0" anchor="ctr"/>
           <a:lstStyle/>
           <a:p>
-            <a:pPr indent="0" marL="0">
+            <a:pPr marL="0" indent="0">
               <a:buNone/>
             </a:pPr>
             <a:r>
@@ -4215,7 +3952,7 @@
           <a:bodyPr wrap="square" lIns="0" tIns="0" rIns="0" bIns="0" rtlCol="0" anchor="ctr"/>
           <a:lstStyle/>
           <a:p>
-            <a:pPr indent="0" marL="0">
+            <a:pPr marL="0" indent="0">
               <a:buNone/>
             </a:pPr>
             <a:r>
@@ -4279,7 +4016,7 @@
           <a:bodyPr wrap="square" lIns="0" tIns="0" rIns="0" bIns="0" rtlCol="0" anchor="ctr"/>
           <a:lstStyle/>
           <a:p>
-            <a:pPr indent="0" marL="0">
+            <a:pPr marL="0" indent="0">
               <a:buNone/>
             </a:pPr>
             <a:r>
@@ -4343,7 +4080,7 @@
           <a:bodyPr wrap="square" lIns="0" tIns="0" rIns="0" bIns="0" rtlCol="0" anchor="ctr"/>
           <a:lstStyle/>
           <a:p>
-            <a:pPr indent="0" marL="0">
+            <a:pPr marL="0" indent="0">
               <a:buNone/>
             </a:pPr>
             <a:r>
@@ -4382,7 +4119,7 @@
           <a:bodyPr wrap="square" lIns="0" tIns="0" rIns="0" bIns="0" rtlCol="0" anchor="ctr"/>
           <a:lstStyle/>
           <a:p>
-            <a:pPr indent="0" marL="0">
+            <a:pPr marL="0" indent="0">
               <a:buNone/>
             </a:pPr>
             <a:r>
@@ -4424,7 +4161,7 @@
             <a:prstDash val="solid"/>
           </a:ln>
           <a:effectLst>
-            <a:outerShdw sx="100000" sy="100000" kx="0" ky="0" algn="bl" rotWithShape="0" blurRad="101600" dist="38100" dir="8100000">
+            <a:outerShdw blurRad="101600" dist="38100" dir="8100000" algn="bl" rotWithShape="0">
               <a:srgbClr val="9EAFC0">
                 <a:alpha val="14000"/>
               </a:srgbClr>
@@ -4478,7 +4215,7 @@
           <a:bodyPr wrap="square" lIns="0" tIns="0" rIns="0" bIns="0" rtlCol="0" anchor="ctr"/>
           <a:lstStyle/>
           <a:p>
-            <a:pPr indent="0" marL="0">
+            <a:pPr marL="0" indent="0">
               <a:buNone/>
             </a:pPr>
             <a:r>
@@ -4542,7 +4279,7 @@
           <a:bodyPr wrap="square" lIns="0" tIns="0" rIns="0" bIns="0" rtlCol="0" anchor="ctr"/>
           <a:lstStyle/>
           <a:p>
-            <a:pPr indent="0" marL="0">
+            <a:pPr marL="0" indent="0">
               <a:buNone/>
             </a:pPr>
             <a:r>
@@ -4606,7 +4343,7 @@
           <a:bodyPr wrap="square" lIns="0" tIns="0" rIns="0" bIns="0" rtlCol="0" anchor="ctr"/>
           <a:lstStyle/>
           <a:p>
-            <a:pPr indent="0" marL="0">
+            <a:pPr marL="0" indent="0">
               <a:buNone/>
             </a:pPr>
             <a:r>
@@ -4670,7 +4407,7 @@
           <a:bodyPr wrap="square" lIns="0" tIns="0" rIns="0" bIns="0" rtlCol="0" anchor="ctr"/>
           <a:lstStyle/>
           <a:p>
-            <a:pPr indent="0" marL="0">
+            <a:pPr marL="0" indent="0">
               <a:buNone/>
             </a:pPr>
             <a:r>
@@ -4709,7 +4446,7 @@
           <a:bodyPr wrap="square" lIns="0" tIns="0" rIns="0" bIns="0" rtlCol="0" anchor="ctr"/>
           <a:lstStyle/>
           <a:p>
-            <a:pPr indent="0" marL="0">
+            <a:pPr marL="0" indent="0">
               <a:buNone/>
             </a:pPr>
             <a:r>
@@ -4751,7 +4488,7 @@
             <a:prstDash val="solid"/>
           </a:ln>
           <a:effectLst>
-            <a:outerShdw sx="100000" sy="100000" kx="0" ky="0" algn="bl" rotWithShape="0" blurRad="101600" dist="38100" dir="8100000">
+            <a:outerShdw blurRad="101600" dist="38100" dir="8100000" algn="bl" rotWithShape="0">
               <a:srgbClr val="9EAFC0">
                 <a:alpha val="14000"/>
               </a:srgbClr>
@@ -4805,7 +4542,7 @@
           <a:bodyPr wrap="square" lIns="0" tIns="0" rIns="0" bIns="0" rtlCol="0" anchor="ctr"/>
           <a:lstStyle/>
           <a:p>
-            <a:pPr indent="0" marL="0">
+            <a:pPr marL="0" indent="0">
               <a:buNone/>
             </a:pPr>
             <a:r>
@@ -4869,7 +4606,7 @@
           <a:bodyPr wrap="square" lIns="0" tIns="0" rIns="0" bIns="0" rtlCol="0" anchor="ctr"/>
           <a:lstStyle/>
           <a:p>
-            <a:pPr indent="0" marL="0">
+            <a:pPr marL="0" indent="0">
               <a:buNone/>
             </a:pPr>
             <a:r>
@@ -4933,7 +4670,7 @@
           <a:bodyPr wrap="square" lIns="0" tIns="0" rIns="0" bIns="0" rtlCol="0" anchor="ctr"/>
           <a:lstStyle/>
           <a:p>
-            <a:pPr indent="0" marL="0">
+            <a:pPr marL="0" indent="0">
               <a:buNone/>
             </a:pPr>
             <a:r>
@@ -4997,7 +4734,7 @@
           <a:bodyPr wrap="square" lIns="0" tIns="0" rIns="0" bIns="0" rtlCol="0" anchor="ctr"/>
           <a:lstStyle/>
           <a:p>
-            <a:pPr indent="0" marL="0">
+            <a:pPr marL="0" indent="0">
               <a:buNone/>
             </a:pPr>
             <a:r>
@@ -5036,7 +4773,7 @@
           <a:bodyPr wrap="square" lIns="0" tIns="0" rIns="0" bIns="0" rtlCol="0" anchor="ctr"/>
           <a:lstStyle/>
           <a:p>
-            <a:pPr indent="0" marL="0">
+            <a:pPr marL="0" indent="0">
               <a:buNone/>
             </a:pPr>
             <a:r>
@@ -5078,7 +4815,7 @@
             <a:prstDash val="solid"/>
           </a:ln>
           <a:effectLst>
-            <a:outerShdw sx="100000" sy="100000" kx="0" ky="0" algn="bl" rotWithShape="0" blurRad="101600" dist="38100" dir="8100000">
+            <a:outerShdw blurRad="101600" dist="38100" dir="8100000" algn="bl" rotWithShape="0">
               <a:srgbClr val="9EAFC0">
                 <a:alpha val="14000"/>
               </a:srgbClr>
@@ -5132,7 +4869,7 @@
           <a:bodyPr wrap="square" lIns="0" tIns="0" rIns="0" bIns="0" rtlCol="0" anchor="ctr"/>
           <a:lstStyle/>
           <a:p>
-            <a:pPr indent="0" marL="0">
+            <a:pPr marL="0" indent="0">
               <a:buNone/>
             </a:pPr>
             <a:r>
@@ -5196,7 +4933,7 @@
           <a:bodyPr wrap="square" lIns="0" tIns="0" rIns="0" bIns="0" rtlCol="0" anchor="ctr"/>
           <a:lstStyle/>
           <a:p>
-            <a:pPr indent="0" marL="0">
+            <a:pPr marL="0" indent="0">
               <a:buNone/>
             </a:pPr>
             <a:r>
@@ -5260,7 +4997,7 @@
           <a:bodyPr wrap="square" lIns="0" tIns="0" rIns="0" bIns="0" rtlCol="0" anchor="ctr"/>
           <a:lstStyle/>
           <a:p>
-            <a:pPr indent="0" marL="0">
+            <a:pPr marL="0" indent="0">
               <a:buNone/>
             </a:pPr>
             <a:r>
@@ -5324,7 +5061,7 @@
           <a:bodyPr wrap="square" lIns="0" tIns="0" rIns="0" bIns="0" rtlCol="0" anchor="ctr"/>
           <a:lstStyle/>
           <a:p>
-            <a:pPr indent="0" marL="0">
+            <a:pPr marL="0" indent="0">
               <a:buNone/>
             </a:pPr>
             <a:r>
@@ -5363,7 +5100,7 @@
           <a:bodyPr wrap="square" lIns="0" tIns="0" rIns="0" bIns="0" rtlCol="0" anchor="ctr"/>
           <a:lstStyle/>
           <a:p>
-            <a:pPr indent="0" marL="0">
+            <a:pPr marL="0" indent="0">
               <a:buNone/>
             </a:pPr>
             <a:r>
@@ -5427,7 +5164,7 @@
           <a:bodyPr wrap="square" lIns="0" tIns="0" rIns="0" bIns="0" rtlCol="0" anchor="ctr"/>
           <a:lstStyle/>
           <a:p>
-            <a:pPr indent="0" marL="0">
+            <a:pPr marL="0" indent="0">
               <a:buNone/>
             </a:pPr>
             <a:r>
@@ -5491,7 +5228,7 @@
           <a:bodyPr wrap="square" lIns="0" tIns="0" rIns="0" bIns="0" rtlCol="0" anchor="ctr"/>
           <a:lstStyle/>
           <a:p>
-            <a:pPr indent="0" marL="0">
+            <a:pPr marL="0" indent="0">
               <a:buNone/>
             </a:pPr>
             <a:r>
@@ -5525,6 +5262,7 @@
         <a:solidFill>
           <a:srgbClr val="F8FAFB"/>
         </a:solidFill>
+        <a:effectLst/>
       </p:bgPr>
     </p:bg>
     <p:spTree>
@@ -5587,7 +5325,7 @@
           <a:bodyPr wrap="square" lIns="0" tIns="0" rIns="0" bIns="0" rtlCol="0" anchor="ctr"/>
           <a:lstStyle/>
           <a:p>
-            <a:pPr indent="0" marL="0">
+            <a:pPr marL="0" indent="0">
               <a:buNone/>
             </a:pPr>
             <a:r>
@@ -5626,7 +5364,7 @@
           <a:bodyPr wrap="square" lIns="0" tIns="0" rIns="0" bIns="0" rtlCol="0" anchor="ctr"/>
           <a:lstStyle/>
           <a:p>
-            <a:pPr indent="0" marL="0">
+            <a:pPr marL="0" indent="0">
               <a:buNone/>
             </a:pPr>
             <a:r>
@@ -5665,7 +5403,7 @@
           <a:bodyPr wrap="square" lIns="0" tIns="0" rIns="0" bIns="0" rtlCol="0" anchor="ctr"/>
           <a:lstStyle/>
           <a:p>
-            <a:pPr indent="0" marL="0">
+            <a:pPr marL="0" indent="0">
               <a:buNone/>
             </a:pPr>
             <a:r>
@@ -5707,7 +5445,7 @@
             <a:prstDash val="solid"/>
           </a:ln>
           <a:effectLst>
-            <a:outerShdw sx="100000" sy="100000" kx="0" ky="0" algn="bl" rotWithShape="0" blurRad="101600" dist="38100" dir="8100000">
+            <a:outerShdw blurRad="101600" dist="38100" dir="8100000" algn="bl" rotWithShape="0">
               <a:srgbClr val="9EAFC0">
                 <a:alpha val="14000"/>
               </a:srgbClr>
@@ -5786,7 +5524,7 @@
           <a:bodyPr wrap="square" lIns="0" tIns="0" rIns="0" bIns="0" rtlCol="0" anchor="ctr"/>
           <a:lstStyle/>
           <a:p>
-            <a:pPr algn="ctr" indent="0" marL="0">
+            <a:pPr marL="0" indent="0" algn="ctr">
               <a:buNone/>
             </a:pPr>
             <a:r>
@@ -5825,7 +5563,7 @@
           <a:bodyPr wrap="square" lIns="0" tIns="0" rIns="0" bIns="0" rtlCol="0" anchor="ctr"/>
           <a:lstStyle/>
           <a:p>
-            <a:pPr indent="0" marL="0">
+            <a:pPr marL="0" indent="0">
               <a:buNone/>
             </a:pPr>
             <a:r>
@@ -5864,7 +5602,7 @@
           <a:bodyPr wrap="square" lIns="0" tIns="0" rIns="0" bIns="0" rtlCol="0" anchor="ctr"/>
           <a:lstStyle/>
           <a:p>
-            <a:pPr indent="0" marL="0">
+            <a:pPr marL="0" indent="0">
               <a:buNone/>
             </a:pPr>
             <a:r>
@@ -5926,7 +5664,7 @@
           <a:bodyPr wrap="square" lIns="0" tIns="0" rIns="0" bIns="0" rtlCol="0" anchor="ctr"/>
           <a:lstStyle/>
           <a:p>
-            <a:pPr indent="0" marL="0">
+            <a:pPr marL="0" indent="0">
               <a:buNone/>
             </a:pPr>
             <a:r>
@@ -5968,7 +5706,7 @@
             <a:prstDash val="solid"/>
           </a:ln>
           <a:effectLst>
-            <a:outerShdw sx="100000" sy="100000" kx="0" ky="0" algn="bl" rotWithShape="0" blurRad="101600" dist="38100" dir="8100000">
+            <a:outerShdw blurRad="101600" dist="38100" dir="8100000" algn="bl" rotWithShape="0">
               <a:srgbClr val="9EAFC0">
                 <a:alpha val="14000"/>
               </a:srgbClr>
@@ -6047,7 +5785,7 @@
           <a:bodyPr wrap="square" lIns="0" tIns="0" rIns="0" bIns="0" rtlCol="0" anchor="ctr"/>
           <a:lstStyle/>
           <a:p>
-            <a:pPr algn="ctr" indent="0" marL="0">
+            <a:pPr marL="0" indent="0" algn="ctr">
               <a:buNone/>
             </a:pPr>
             <a:r>
@@ -6086,7 +5824,7 @@
           <a:bodyPr wrap="square" lIns="0" tIns="0" rIns="0" bIns="0" rtlCol="0" anchor="ctr"/>
           <a:lstStyle/>
           <a:p>
-            <a:pPr indent="0" marL="0">
+            <a:pPr marL="0" indent="0">
               <a:buNone/>
             </a:pPr>
             <a:r>
@@ -6125,7 +5863,7 @@
           <a:bodyPr wrap="square" lIns="0" tIns="0" rIns="0" bIns="0" rtlCol="0" anchor="ctr"/>
           <a:lstStyle/>
           <a:p>
-            <a:pPr indent="0" marL="0">
+            <a:pPr marL="0" indent="0">
               <a:buNone/>
             </a:pPr>
             <a:r>
@@ -6187,7 +5925,7 @@
           <a:bodyPr wrap="square" lIns="0" tIns="0" rIns="0" bIns="0" rtlCol="0" anchor="ctr"/>
           <a:lstStyle/>
           <a:p>
-            <a:pPr indent="0" marL="0">
+            <a:pPr marL="0" indent="0">
               <a:buNone/>
             </a:pPr>
             <a:r>
@@ -6229,7 +5967,7 @@
             <a:prstDash val="solid"/>
           </a:ln>
           <a:effectLst>
-            <a:outerShdw sx="100000" sy="100000" kx="0" ky="0" algn="bl" rotWithShape="0" blurRad="101600" dist="38100" dir="8100000">
+            <a:outerShdw blurRad="101600" dist="38100" dir="8100000" algn="bl" rotWithShape="0">
               <a:srgbClr val="9EAFC0">
                 <a:alpha val="14000"/>
               </a:srgbClr>
@@ -6308,7 +6046,7 @@
           <a:bodyPr wrap="square" lIns="0" tIns="0" rIns="0" bIns="0" rtlCol="0" anchor="ctr"/>
           <a:lstStyle/>
           <a:p>
-            <a:pPr algn="ctr" indent="0" marL="0">
+            <a:pPr marL="0" indent="0" algn="ctr">
               <a:buNone/>
             </a:pPr>
             <a:r>
@@ -6347,7 +6085,7 @@
           <a:bodyPr wrap="square" lIns="0" tIns="0" rIns="0" bIns="0" rtlCol="0" anchor="ctr"/>
           <a:lstStyle/>
           <a:p>
-            <a:pPr indent="0" marL="0">
+            <a:pPr marL="0" indent="0">
               <a:buNone/>
             </a:pPr>
             <a:r>
@@ -6386,7 +6124,7 @@
           <a:bodyPr wrap="square" lIns="0" tIns="0" rIns="0" bIns="0" rtlCol="0" anchor="ctr"/>
           <a:lstStyle/>
           <a:p>
-            <a:pPr indent="0" marL="0">
+            <a:pPr marL="0" indent="0">
               <a:buNone/>
             </a:pPr>
             <a:r>
@@ -6448,7 +6186,7 @@
           <a:bodyPr wrap="square" lIns="0" tIns="0" rIns="0" bIns="0" rtlCol="0" anchor="ctr"/>
           <a:lstStyle/>
           <a:p>
-            <a:pPr indent="0" marL="0">
+            <a:pPr marL="0" indent="0">
               <a:buNone/>
             </a:pPr>
             <a:r>
@@ -6490,7 +6228,7 @@
             <a:prstDash val="solid"/>
           </a:ln>
           <a:effectLst>
-            <a:outerShdw sx="100000" sy="100000" kx="0" ky="0" algn="bl" rotWithShape="0" blurRad="101600" dist="38100" dir="8100000">
+            <a:outerShdw blurRad="101600" dist="38100" dir="8100000" algn="bl" rotWithShape="0">
               <a:srgbClr val="9EAFC0">
                 <a:alpha val="14000"/>
               </a:srgbClr>
@@ -6569,7 +6307,7 @@
           <a:bodyPr wrap="square" lIns="0" tIns="0" rIns="0" bIns="0" rtlCol="0" anchor="ctr"/>
           <a:lstStyle/>
           <a:p>
-            <a:pPr algn="ctr" indent="0" marL="0">
+            <a:pPr marL="0" indent="0" algn="ctr">
               <a:buNone/>
             </a:pPr>
             <a:r>
@@ -6608,7 +6346,7 @@
           <a:bodyPr wrap="square" lIns="0" tIns="0" rIns="0" bIns="0" rtlCol="0" anchor="ctr"/>
           <a:lstStyle/>
           <a:p>
-            <a:pPr indent="0" marL="0">
+            <a:pPr marL="0" indent="0">
               <a:buNone/>
             </a:pPr>
             <a:r>
@@ -6647,7 +6385,7 @@
           <a:bodyPr wrap="square" lIns="0" tIns="0" rIns="0" bIns="0" rtlCol="0" anchor="ctr"/>
           <a:lstStyle/>
           <a:p>
-            <a:pPr indent="0" marL="0">
+            <a:pPr marL="0" indent="0">
               <a:buNone/>
             </a:pPr>
             <a:r>
@@ -6709,7 +6447,7 @@
           <a:bodyPr wrap="square" lIns="0" tIns="0" rIns="0" bIns="0" rtlCol="0" anchor="ctr"/>
           <a:lstStyle/>
           <a:p>
-            <a:pPr indent="0" marL="0">
+            <a:pPr marL="0" indent="0">
               <a:buNone/>
             </a:pPr>
             <a:r>
@@ -6751,7 +6489,7 @@
             <a:prstDash val="solid"/>
           </a:ln>
           <a:effectLst>
-            <a:outerShdw sx="100000" sy="100000" kx="0" ky="0" algn="bl" rotWithShape="0" blurRad="101600" dist="38100" dir="8100000">
+            <a:outerShdw blurRad="101600" dist="38100" dir="8100000" algn="bl" rotWithShape="0">
               <a:srgbClr val="9EAFC0">
                 <a:alpha val="14000"/>
               </a:srgbClr>
@@ -6830,7 +6568,7 @@
           <a:bodyPr wrap="square" lIns="0" tIns="0" rIns="0" bIns="0" rtlCol="0" anchor="ctr"/>
           <a:lstStyle/>
           <a:p>
-            <a:pPr algn="ctr" indent="0" marL="0">
+            <a:pPr marL="0" indent="0" algn="ctr">
               <a:buNone/>
             </a:pPr>
             <a:r>
@@ -6869,7 +6607,7 @@
           <a:bodyPr wrap="square" lIns="0" tIns="0" rIns="0" bIns="0" rtlCol="0" anchor="ctr"/>
           <a:lstStyle/>
           <a:p>
-            <a:pPr indent="0" marL="0">
+            <a:pPr marL="0" indent="0">
               <a:buNone/>
             </a:pPr>
             <a:r>
@@ -6908,7 +6646,7 @@
           <a:bodyPr wrap="square" lIns="0" tIns="0" rIns="0" bIns="0" rtlCol="0" anchor="ctr"/>
           <a:lstStyle/>
           <a:p>
-            <a:pPr indent="0" marL="0">
+            <a:pPr marL="0" indent="0">
               <a:buNone/>
             </a:pPr>
             <a:r>
@@ -6970,7 +6708,7 @@
           <a:bodyPr wrap="square" lIns="0" tIns="0" rIns="0" bIns="0" rtlCol="0" anchor="ctr"/>
           <a:lstStyle/>
           <a:p>
-            <a:pPr indent="0" marL="0">
+            <a:pPr marL="0" indent="0">
               <a:buNone/>
             </a:pPr>
             <a:r>
@@ -7034,7 +6772,7 @@
           <a:bodyPr wrap="square" lIns="0" tIns="0" rIns="0" bIns="0" rtlCol="0" anchor="ctr"/>
           <a:lstStyle/>
           <a:p>
-            <a:pPr indent="0" marL="0">
+            <a:pPr marL="0" indent="0">
               <a:buNone/>
             </a:pPr>
             <a:r>
@@ -7068,6 +6806,7 @@
         <a:solidFill>
           <a:srgbClr val="FFFFFF"/>
         </a:solidFill>
+        <a:effectLst/>
       </p:bgPr>
     </p:bg>
     <p:spTree>
@@ -7184,7 +6923,7 @@
           <a:bodyPr wrap="square" lIns="0" tIns="0" rIns="0" bIns="0" rtlCol="0" anchor="ctr"/>
           <a:lstStyle/>
           <a:p>
-            <a:pPr indent="0" marL="0">
+            <a:pPr marL="0" indent="0">
               <a:lnSpc>
                 <a:spcPct val="108000"/>
               </a:lnSpc>
@@ -7204,7 +6943,7 @@
             <a:endParaRPr lang="en-US" sz="3400" dirty="0"/>
           </a:p>
           <a:p>
-            <a:pPr indent="0" marL="0">
+            <a:pPr marL="0" indent="0">
               <a:lnSpc>
                 <a:spcPct val="108000"/>
               </a:lnSpc>
@@ -7269,7 +7008,7 @@
           <a:bodyPr wrap="square" lIns="0" tIns="0" rIns="0" bIns="0" rtlCol="0" anchor="ctr"/>
           <a:lstStyle/>
           <a:p>
-            <a:pPr indent="0" marL="0">
+            <a:pPr marL="0" indent="0">
               <a:buNone/>
             </a:pPr>
             <a:r>
@@ -7308,7 +7047,7 @@
           <a:bodyPr wrap="square" lIns="0" tIns="0" rIns="0" bIns="0" rtlCol="0" anchor="ctr"/>
           <a:lstStyle/>
           <a:p>
-            <a:pPr indent="0" marL="0">
+            <a:pPr marL="0" indent="0">
               <a:buNone/>
             </a:pPr>
             <a:r>
@@ -7347,7 +7086,7 @@
           <a:bodyPr wrap="square" lIns="0" tIns="0" rIns="0" bIns="0" rtlCol="0" anchor="ctr"/>
           <a:lstStyle/>
           <a:p>
-            <a:pPr indent="0" marL="0">
+            <a:pPr marL="0" indent="0">
               <a:buNone/>
             </a:pPr>
             <a:r>
@@ -7412,7 +7151,7 @@
             <a:prstDash val="solid"/>
           </a:ln>
           <a:effectLst>
-            <a:outerShdw sx="100000" sy="100000" kx="0" ky="0" algn="bl" rotWithShape="0" blurRad="101600" dist="38100" dir="8100000">
+            <a:outerShdw blurRad="101600" dist="38100" dir="8100000" algn="bl" rotWithShape="0">
               <a:srgbClr val="9EAFC0">
                 <a:alpha val="14000"/>
               </a:srgbClr>
@@ -7491,7 +7230,7 @@
           <a:bodyPr wrap="square" lIns="0" tIns="0" rIns="0" bIns="0" rtlCol="0" anchor="ctr"/>
           <a:lstStyle/>
           <a:p>
-            <a:pPr algn="ctr" indent="0" marL="0">
+            <a:pPr marL="0" indent="0" algn="ctr">
               <a:buNone/>
             </a:pPr>
             <a:r>
@@ -7530,7 +7269,7 @@
           <a:bodyPr wrap="square" lIns="0" tIns="0" rIns="0" bIns="0" rtlCol="0" anchor="ctr"/>
           <a:lstStyle/>
           <a:p>
-            <a:pPr indent="0" marL="0">
+            <a:pPr marL="0" indent="0">
               <a:buNone/>
             </a:pPr>
             <a:r>
@@ -7569,7 +7308,7 @@
           <a:bodyPr wrap="square" lIns="0" tIns="0" rIns="0" bIns="0" rtlCol="0" anchor="ctr"/>
           <a:lstStyle/>
           <a:p>
-            <a:pPr indent="0" marL="0">
+            <a:pPr marL="0" indent="0">
               <a:lnSpc>
                 <a:spcPct val="130000"/>
               </a:lnSpc>
@@ -7614,7 +7353,7 @@
             <a:prstDash val="solid"/>
           </a:ln>
           <a:effectLst>
-            <a:outerShdw sx="100000" sy="100000" kx="0" ky="0" algn="bl" rotWithShape="0" blurRad="101600" dist="38100" dir="8100000">
+            <a:outerShdw blurRad="101600" dist="38100" dir="8100000" algn="bl" rotWithShape="0">
               <a:srgbClr val="9EAFC0">
                 <a:alpha val="14000"/>
               </a:srgbClr>
@@ -7693,7 +7432,7 @@
           <a:bodyPr wrap="square" lIns="0" tIns="0" rIns="0" bIns="0" rtlCol="0" anchor="ctr"/>
           <a:lstStyle/>
           <a:p>
-            <a:pPr algn="ctr" indent="0" marL="0">
+            <a:pPr marL="0" indent="0" algn="ctr">
               <a:buNone/>
             </a:pPr>
             <a:r>
@@ -7732,7 +7471,7 @@
           <a:bodyPr wrap="square" lIns="0" tIns="0" rIns="0" bIns="0" rtlCol="0" anchor="ctr"/>
           <a:lstStyle/>
           <a:p>
-            <a:pPr indent="0" marL="0">
+            <a:pPr marL="0" indent="0">
               <a:buNone/>
             </a:pPr>
             <a:r>
@@ -7771,7 +7510,7 @@
           <a:bodyPr wrap="square" lIns="0" tIns="0" rIns="0" bIns="0" rtlCol="0" anchor="ctr"/>
           <a:lstStyle/>
           <a:p>
-            <a:pPr indent="0" marL="0">
+            <a:pPr marL="0" indent="0">
               <a:lnSpc>
                 <a:spcPct val="130000"/>
               </a:lnSpc>
@@ -7816,7 +7555,7 @@
             <a:prstDash val="solid"/>
           </a:ln>
           <a:effectLst>
-            <a:outerShdw sx="100000" sy="100000" kx="0" ky="0" algn="bl" rotWithShape="0" blurRad="101600" dist="38100" dir="8100000">
+            <a:outerShdw blurRad="101600" dist="38100" dir="8100000" algn="bl" rotWithShape="0">
               <a:srgbClr val="9EAFC0">
                 <a:alpha val="14000"/>
               </a:srgbClr>
@@ -7895,7 +7634,7 @@
           <a:bodyPr wrap="square" lIns="0" tIns="0" rIns="0" bIns="0" rtlCol="0" anchor="ctr"/>
           <a:lstStyle/>
           <a:p>
-            <a:pPr algn="ctr" indent="0" marL="0">
+            <a:pPr marL="0" indent="0" algn="ctr">
               <a:buNone/>
             </a:pPr>
             <a:r>
@@ -7934,7 +7673,7 @@
           <a:bodyPr wrap="square" lIns="0" tIns="0" rIns="0" bIns="0" rtlCol="0" anchor="ctr"/>
           <a:lstStyle/>
           <a:p>
-            <a:pPr indent="0" marL="0">
+            <a:pPr marL="0" indent="0">
               <a:buNone/>
             </a:pPr>
             <a:r>
@@ -7973,7 +7712,7 @@
           <a:bodyPr wrap="square" lIns="0" tIns="0" rIns="0" bIns="0" rtlCol="0" anchor="ctr"/>
           <a:lstStyle/>
           <a:p>
-            <a:pPr indent="0" marL="0">
+            <a:pPr marL="0" indent="0">
               <a:lnSpc>
                 <a:spcPct val="130000"/>
               </a:lnSpc>
@@ -8040,7 +7779,7 @@
           <a:bodyPr wrap="square" lIns="0" tIns="0" rIns="0" bIns="0" rtlCol="0" anchor="ctr"/>
           <a:lstStyle/>
           <a:p>
-            <a:pPr indent="0" marL="0">
+            <a:pPr marL="0" indent="0">
               <a:buNone/>
             </a:pPr>
             <a:r>
@@ -8074,6 +7813,7 @@
         <a:solidFill>
           <a:srgbClr val="FFFFFF"/>
         </a:solidFill>
+        <a:effectLst/>
       </p:bgPr>
     </p:bg>
     <p:spTree>
@@ -8136,7 +7876,7 @@
           <a:bodyPr wrap="square" lIns="0" tIns="0" rIns="0" bIns="0" rtlCol="0" anchor="ctr"/>
           <a:lstStyle/>
           <a:p>
-            <a:pPr indent="0" marL="0">
+            <a:pPr marL="0" indent="0">
               <a:buNone/>
             </a:pPr>
             <a:r>
@@ -8175,7 +7915,7 @@
           <a:bodyPr wrap="square" lIns="0" tIns="0" rIns="0" bIns="0" rtlCol="0" anchor="ctr"/>
           <a:lstStyle/>
           <a:p>
-            <a:pPr indent="0" marL="0">
+            <a:pPr marL="0" indent="0">
               <a:lnSpc>
                 <a:spcPct val="115000"/>
               </a:lnSpc>
@@ -8195,7 +7935,7 @@
             <a:endParaRPr lang="en-US" sz="2600" dirty="0"/>
           </a:p>
           <a:p>
-            <a:pPr indent="0" marL="0">
+            <a:pPr marL="0" indent="0">
               <a:lnSpc>
                 <a:spcPct val="115000"/>
               </a:lnSpc>
@@ -8263,7 +8003,7 @@
             <a:prstDash val="solid"/>
           </a:ln>
           <a:effectLst>
-            <a:outerShdw sx="100000" sy="100000" kx="0" ky="0" algn="bl" rotWithShape="0" blurRad="101600" dist="38100" dir="8100000">
+            <a:outerShdw blurRad="101600" dist="38100" dir="8100000" algn="bl" rotWithShape="0">
               <a:srgbClr val="9EAFC0">
                 <a:alpha val="14000"/>
               </a:srgbClr>
@@ -8317,7 +8057,7 @@
           <a:bodyPr wrap="square" lIns="0" tIns="0" rIns="0" bIns="0" rtlCol="0" anchor="ctr"/>
           <a:lstStyle/>
           <a:p>
-            <a:pPr indent="0" marL="0">
+            <a:pPr marL="0" indent="0">
               <a:buNone/>
             </a:pPr>
             <a:r>
@@ -8356,7 +8096,7 @@
           <a:bodyPr wrap="square" lIns="0" tIns="0" rIns="0" bIns="0" rtlCol="0" anchor="ctr"/>
           <a:lstStyle/>
           <a:p>
-            <a:pPr indent="0" marL="0">
+            <a:pPr marL="0" indent="0">
               <a:buNone/>
             </a:pPr>
             <a:r>
@@ -8395,7 +8135,7 @@
           <a:bodyPr wrap="square" lIns="0" tIns="0" rIns="0" bIns="0" rtlCol="0" anchor="ctr"/>
           <a:lstStyle/>
           <a:p>
-            <a:pPr indent="0" marL="0">
+            <a:pPr marL="0" indent="0">
               <a:buNone/>
             </a:pPr>
             <a:r>
@@ -8437,7 +8177,7 @@
             <a:prstDash val="solid"/>
           </a:ln>
           <a:effectLst>
-            <a:outerShdw sx="100000" sy="100000" kx="0" ky="0" algn="bl" rotWithShape="0" blurRad="101600" dist="38100" dir="8100000">
+            <a:outerShdw blurRad="101600" dist="38100" dir="8100000" algn="bl" rotWithShape="0">
               <a:srgbClr val="9EAFC0">
                 <a:alpha val="14000"/>
               </a:srgbClr>
@@ -8491,7 +8231,7 @@
           <a:bodyPr wrap="square" lIns="0" tIns="0" rIns="0" bIns="0" rtlCol="0" anchor="ctr"/>
           <a:lstStyle/>
           <a:p>
-            <a:pPr indent="0" marL="0">
+            <a:pPr marL="0" indent="0">
               <a:buNone/>
             </a:pPr>
             <a:r>
@@ -8530,7 +8270,7 @@
           <a:bodyPr wrap="square" lIns="0" tIns="0" rIns="0" bIns="0" rtlCol="0" anchor="ctr"/>
           <a:lstStyle/>
           <a:p>
-            <a:pPr indent="0" marL="0">
+            <a:pPr marL="0" indent="0">
               <a:buNone/>
             </a:pPr>
             <a:r>
@@ -8569,7 +8309,7 @@
           <a:bodyPr wrap="square" lIns="0" tIns="0" rIns="0" bIns="0" rtlCol="0" anchor="ctr"/>
           <a:lstStyle/>
           <a:p>
-            <a:pPr indent="0" marL="0">
+            <a:pPr marL="0" indent="0">
               <a:buNone/>
             </a:pPr>
             <a:r>
@@ -8611,7 +8351,7 @@
             <a:prstDash val="solid"/>
           </a:ln>
           <a:effectLst>
-            <a:outerShdw sx="100000" sy="100000" kx="0" ky="0" algn="bl" rotWithShape="0" blurRad="101600" dist="38100" dir="8100000">
+            <a:outerShdw blurRad="101600" dist="38100" dir="8100000" algn="bl" rotWithShape="0">
               <a:srgbClr val="9EAFC0">
                 <a:alpha val="14000"/>
               </a:srgbClr>
@@ -8665,7 +8405,7 @@
           <a:bodyPr wrap="square" lIns="0" tIns="0" rIns="0" bIns="0" rtlCol="0" anchor="ctr"/>
           <a:lstStyle/>
           <a:p>
-            <a:pPr indent="0" marL="0">
+            <a:pPr marL="0" indent="0">
               <a:buNone/>
             </a:pPr>
             <a:r>
@@ -8704,7 +8444,7 @@
           <a:bodyPr wrap="square" lIns="0" tIns="0" rIns="0" bIns="0" rtlCol="0" anchor="ctr"/>
           <a:lstStyle/>
           <a:p>
-            <a:pPr indent="0" marL="0">
+            <a:pPr marL="0" indent="0">
               <a:buNone/>
             </a:pPr>
             <a:r>
@@ -8743,7 +8483,7 @@
           <a:bodyPr wrap="square" lIns="0" tIns="0" rIns="0" bIns="0" rtlCol="0" anchor="ctr"/>
           <a:lstStyle/>
           <a:p>
-            <a:pPr indent="0" marL="0">
+            <a:pPr marL="0" indent="0">
               <a:buNone/>
             </a:pPr>
             <a:r>
@@ -8785,7 +8525,7 @@
             <a:prstDash val="solid"/>
           </a:ln>
           <a:effectLst>
-            <a:outerShdw sx="100000" sy="100000" kx="0" ky="0" algn="bl" rotWithShape="0" blurRad="101600" dist="38100" dir="8100000">
+            <a:outerShdw blurRad="101600" dist="38100" dir="8100000" algn="bl" rotWithShape="0">
               <a:srgbClr val="9EAFC0">
                 <a:alpha val="14000"/>
               </a:srgbClr>
@@ -8839,7 +8579,7 @@
           <a:bodyPr wrap="square" lIns="0" tIns="0" rIns="0" bIns="0" rtlCol="0" anchor="ctr"/>
           <a:lstStyle/>
           <a:p>
-            <a:pPr indent="0" marL="0">
+            <a:pPr marL="0" indent="0">
               <a:buNone/>
             </a:pPr>
             <a:r>
@@ -8878,7 +8618,7 @@
           <a:bodyPr wrap="square" lIns="0" tIns="0" rIns="0" bIns="0" rtlCol="0" anchor="ctr"/>
           <a:lstStyle/>
           <a:p>
-            <a:pPr indent="0" marL="0">
+            <a:pPr marL="0" indent="0">
               <a:buNone/>
             </a:pPr>
             <a:r>
@@ -8917,7 +8657,7 @@
           <a:bodyPr wrap="square" lIns="0" tIns="0" rIns="0" bIns="0" rtlCol="0" anchor="ctr"/>
           <a:lstStyle/>
           <a:p>
-            <a:pPr indent="0" marL="0">
+            <a:pPr marL="0" indent="0">
               <a:buNone/>
             </a:pPr>
             <a:r>
@@ -8981,7 +8721,7 @@
           <a:bodyPr wrap="square" lIns="0" tIns="0" rIns="0" bIns="0" rtlCol="0" anchor="ctr"/>
           <a:lstStyle/>
           <a:p>
-            <a:pPr indent="0" marL="0">
+            <a:pPr marL="0" indent="0">
               <a:buNone/>
             </a:pPr>
             <a:r>
@@ -9015,6 +8755,7 @@
         <a:solidFill>
           <a:srgbClr val="F8FAFB"/>
         </a:solidFill>
+        <a:effectLst/>
       </p:bgPr>
     </p:bg>
     <p:spTree>
@@ -9077,7 +8818,7 @@
           <a:bodyPr wrap="square" lIns="0" tIns="0" rIns="0" bIns="0" rtlCol="0" anchor="ctr"/>
           <a:lstStyle/>
           <a:p>
-            <a:pPr indent="0" marL="0">
+            <a:pPr marL="0" indent="0">
               <a:buNone/>
             </a:pPr>
             <a:r>
@@ -9116,7 +8857,7 @@
           <a:bodyPr wrap="square" lIns="0" tIns="0" rIns="0" bIns="0" rtlCol="0" anchor="ctr"/>
           <a:lstStyle/>
           <a:p>
-            <a:pPr indent="0" marL="0">
+            <a:pPr marL="0" indent="0">
               <a:buNone/>
             </a:pPr>
             <a:r>
@@ -9155,7 +8896,7 @@
           <a:bodyPr wrap="square" lIns="0" tIns="0" rIns="0" bIns="0" rtlCol="0" anchor="ctr"/>
           <a:lstStyle/>
           <a:p>
-            <a:pPr indent="0" marL="0">
+            <a:pPr marL="0" indent="0">
               <a:buNone/>
             </a:pPr>
             <a:r>
@@ -9197,7 +8938,7 @@
             <a:prstDash val="solid"/>
           </a:ln>
           <a:effectLst>
-            <a:outerShdw sx="100000" sy="100000" kx="0" ky="0" algn="bl" rotWithShape="0" blurRad="101600" dist="38100" dir="8100000">
+            <a:outerShdw blurRad="101600" dist="38100" dir="8100000" algn="bl" rotWithShape="0">
               <a:srgbClr val="9EAFC0">
                 <a:alpha val="14000"/>
               </a:srgbClr>
@@ -9251,7 +8992,7 @@
           <a:bodyPr wrap="square" lIns="0" tIns="0" rIns="0" bIns="0" rtlCol="0" anchor="ctr"/>
           <a:lstStyle/>
           <a:p>
-            <a:pPr indent="0" marL="0">
+            <a:pPr marL="0" indent="0">
               <a:buNone/>
             </a:pPr>
             <a:r>
@@ -9290,7 +9031,7 @@
           <a:bodyPr wrap="square" lIns="0" tIns="0" rIns="0" bIns="0" rtlCol="0" anchor="ctr"/>
           <a:lstStyle/>
           <a:p>
-            <a:pPr indent="0" marL="0">
+            <a:pPr marL="0" indent="0">
               <a:buNone/>
             </a:pPr>
             <a:r>
@@ -9329,7 +9070,7 @@
           <a:bodyPr wrap="square" lIns="0" tIns="0" rIns="0" bIns="0" rtlCol="0" anchor="ctr"/>
           <a:lstStyle/>
           <a:p>
-            <a:pPr indent="0" marL="0">
+            <a:pPr marL="0" indent="0">
               <a:buNone/>
             </a:pPr>
             <a:r>
@@ -9416,7 +9157,7 @@
           <a:bodyPr wrap="square" lIns="0" tIns="0" rIns="0" bIns="0" rtlCol="0" anchor="ctr"/>
           <a:lstStyle/>
           <a:p>
-            <a:pPr indent="0" marL="0">
+            <a:pPr marL="0" indent="0">
               <a:buNone/>
             </a:pPr>
             <a:r>
@@ -9455,7 +9196,7 @@
           <a:bodyPr wrap="square" lIns="0" tIns="0" rIns="0" bIns="0" rtlCol="0" anchor="ctr"/>
           <a:lstStyle/>
           <a:p>
-            <a:pPr indent="0" marL="0">
+            <a:pPr marL="0" indent="0">
               <a:buNone/>
             </a:pPr>
             <a:r>
@@ -9494,7 +9235,7 @@
           <a:bodyPr wrap="square" lIns="0" tIns="0" rIns="0" bIns="0" rtlCol="0" anchor="ctr"/>
           <a:lstStyle/>
           <a:p>
-            <a:pPr indent="0" marL="0">
+            <a:pPr marL="0" indent="0">
               <a:buNone/>
             </a:pPr>
             <a:r>
@@ -9536,7 +9277,7 @@
             <a:prstDash val="solid"/>
           </a:ln>
           <a:effectLst>
-            <a:outerShdw sx="100000" sy="100000" kx="0" ky="0" algn="bl" rotWithShape="0" blurRad="101600" dist="38100" dir="8100000">
+            <a:outerShdw blurRad="101600" dist="38100" dir="8100000" algn="bl" rotWithShape="0">
               <a:srgbClr val="9EAFC0">
                 <a:alpha val="14000"/>
               </a:srgbClr>
@@ -9590,7 +9331,7 @@
           <a:bodyPr wrap="square" lIns="0" tIns="0" rIns="0" bIns="0" rtlCol="0" anchor="ctr"/>
           <a:lstStyle/>
           <a:p>
-            <a:pPr indent="0" marL="0">
+            <a:pPr marL="0" indent="0">
               <a:buNone/>
             </a:pPr>
             <a:r>
@@ -9629,7 +9370,7 @@
           <a:bodyPr wrap="square" lIns="0" tIns="0" rIns="0" bIns="0" rtlCol="0" anchor="ctr"/>
           <a:lstStyle/>
           <a:p>
-            <a:pPr indent="0" marL="0">
+            <a:pPr marL="0" indent="0">
               <a:buNone/>
             </a:pPr>
             <a:r>
@@ -9668,7 +9409,7 @@
           <a:bodyPr wrap="square" lIns="0" tIns="0" rIns="0" bIns="0" rtlCol="0" anchor="ctr"/>
           <a:lstStyle/>
           <a:p>
-            <a:pPr indent="0" marL="0">
+            <a:pPr marL="0" indent="0">
               <a:buNone/>
             </a:pPr>
             <a:r>
@@ -9755,7 +9496,7 @@
           <a:bodyPr wrap="square" lIns="0" tIns="0" rIns="0" bIns="0" rtlCol="0" anchor="ctr"/>
           <a:lstStyle/>
           <a:p>
-            <a:pPr indent="0" marL="0">
+            <a:pPr marL="0" indent="0">
               <a:buNone/>
             </a:pPr>
             <a:r>
@@ -9794,7 +9535,7 @@
           <a:bodyPr wrap="square" lIns="0" tIns="0" rIns="0" bIns="0" rtlCol="0" anchor="ctr"/>
           <a:lstStyle/>
           <a:p>
-            <a:pPr indent="0" marL="0">
+            <a:pPr marL="0" indent="0">
               <a:buNone/>
             </a:pPr>
             <a:r>
@@ -9833,7 +9574,7 @@
           <a:bodyPr wrap="square" lIns="0" tIns="0" rIns="0" bIns="0" rtlCol="0" anchor="ctr"/>
           <a:lstStyle/>
           <a:p>
-            <a:pPr indent="0" marL="0">
+            <a:pPr marL="0" indent="0">
               <a:buNone/>
             </a:pPr>
             <a:r>
@@ -9875,7 +9616,7 @@
             <a:prstDash val="solid"/>
           </a:ln>
           <a:effectLst>
-            <a:outerShdw sx="100000" sy="100000" kx="0" ky="0" algn="bl" rotWithShape="0" blurRad="101600" dist="38100" dir="8100000">
+            <a:outerShdw blurRad="101600" dist="38100" dir="8100000" algn="bl" rotWithShape="0">
               <a:srgbClr val="9EAFC0">
                 <a:alpha val="14000"/>
               </a:srgbClr>
@@ -9929,7 +9670,7 @@
           <a:bodyPr wrap="square" lIns="0" tIns="0" rIns="0" bIns="0" rtlCol="0" anchor="ctr"/>
           <a:lstStyle/>
           <a:p>
-            <a:pPr indent="0" marL="0">
+            <a:pPr marL="0" indent="0">
               <a:buNone/>
             </a:pPr>
             <a:r>
@@ -9968,7 +9709,7 @@
           <a:bodyPr wrap="square" lIns="0" tIns="0" rIns="0" bIns="0" rtlCol="0" anchor="ctr"/>
           <a:lstStyle/>
           <a:p>
-            <a:pPr indent="0" marL="0">
+            <a:pPr marL="0" indent="0">
               <a:buNone/>
             </a:pPr>
             <a:r>
@@ -10007,7 +9748,7 @@
           <a:bodyPr wrap="square" lIns="0" tIns="0" rIns="0" bIns="0" rtlCol="0" anchor="ctr"/>
           <a:lstStyle/>
           <a:p>
-            <a:pPr indent="0" marL="0">
+            <a:pPr marL="0" indent="0">
               <a:buNone/>
             </a:pPr>
             <a:r>
@@ -10094,7 +9835,7 @@
           <a:bodyPr wrap="square" lIns="0" tIns="0" rIns="0" bIns="0" rtlCol="0" anchor="ctr"/>
           <a:lstStyle/>
           <a:p>
-            <a:pPr indent="0" marL="0">
+            <a:pPr marL="0" indent="0">
               <a:buNone/>
             </a:pPr>
             <a:r>
@@ -10133,7 +9874,7 @@
           <a:bodyPr wrap="square" lIns="0" tIns="0" rIns="0" bIns="0" rtlCol="0" anchor="ctr"/>
           <a:lstStyle/>
           <a:p>
-            <a:pPr indent="0" marL="0">
+            <a:pPr marL="0" indent="0">
               <a:buNone/>
             </a:pPr>
             <a:r>
@@ -10172,7 +9913,7 @@
           <a:bodyPr wrap="square" lIns="0" tIns="0" rIns="0" bIns="0" rtlCol="0" anchor="ctr"/>
           <a:lstStyle/>
           <a:p>
-            <a:pPr indent="0" marL="0">
+            <a:pPr marL="0" indent="0">
               <a:buNone/>
             </a:pPr>
             <a:r>
@@ -10236,7 +9977,7 @@
           <a:bodyPr wrap="square" lIns="0" tIns="0" rIns="0" bIns="0" rtlCol="0" anchor="ctr"/>
           <a:lstStyle/>
           <a:p>
-            <a:pPr indent="0" marL="0">
+            <a:pPr marL="0" indent="0">
               <a:buNone/>
             </a:pPr>
             <a:r>
@@ -10270,6 +10011,7 @@
         <a:solidFill>
           <a:srgbClr val="FFFFFF"/>
         </a:solidFill>
+        <a:effectLst/>
       </p:bgPr>
     </p:bg>
     <p:spTree>
@@ -10332,7 +10074,7 @@
           <a:bodyPr wrap="square" lIns="0" tIns="0" rIns="0" bIns="0" rtlCol="0" anchor="ctr"/>
           <a:lstStyle/>
           <a:p>
-            <a:pPr indent="0" marL="0">
+            <a:pPr marL="0" indent="0">
               <a:buNone/>
             </a:pPr>
             <a:r>
@@ -10371,7 +10113,7 @@
           <a:bodyPr wrap="square" lIns="0" tIns="0" rIns="0" bIns="0" rtlCol="0" anchor="ctr"/>
           <a:lstStyle/>
           <a:p>
-            <a:pPr indent="0" marL="0">
+            <a:pPr marL="0" indent="0">
               <a:buNone/>
             </a:pPr>
             <a:r>
@@ -10410,7 +10152,7 @@
           <a:bodyPr wrap="square" lIns="0" tIns="0" rIns="0" bIns="0" rtlCol="0" anchor="ctr"/>
           <a:lstStyle/>
           <a:p>
-            <a:pPr indent="0" marL="0">
+            <a:pPr marL="0" indent="0">
               <a:buNone/>
             </a:pPr>
             <a:r>
@@ -10452,7 +10194,7 @@
             <a:prstDash val="solid"/>
           </a:ln>
           <a:effectLst>
-            <a:outerShdw sx="100000" sy="100000" kx="0" ky="0" algn="bl" rotWithShape="0" blurRad="101600" dist="38100" dir="8100000">
+            <a:outerShdw blurRad="101600" dist="38100" dir="8100000" algn="bl" rotWithShape="0">
               <a:srgbClr val="9EAFC0">
                 <a:alpha val="14000"/>
               </a:srgbClr>
@@ -10506,7 +10248,7 @@
           <a:bodyPr wrap="square" lIns="0" tIns="0" rIns="0" bIns="0" rtlCol="0" anchor="ctr"/>
           <a:lstStyle/>
           <a:p>
-            <a:pPr indent="0" marL="0">
+            <a:pPr marL="0" indent="0">
               <a:buNone/>
             </a:pPr>
             <a:r>
@@ -10545,7 +10287,7 @@
           <a:bodyPr wrap="square" lIns="0" tIns="0" rIns="0" bIns="0" rtlCol="0" anchor="ctr"/>
           <a:lstStyle/>
           <a:p>
-            <a:pPr indent="0" marL="0">
+            <a:pPr marL="0" indent="0">
               <a:buNone/>
             </a:pPr>
             <a:r>
@@ -10632,7 +10374,7 @@
           <a:bodyPr wrap="square" lIns="0" tIns="0" rIns="0" bIns="0" rtlCol="0" anchor="ctr"/>
           <a:lstStyle/>
           <a:p>
-            <a:pPr indent="0" marL="0">
+            <a:pPr marL="0" indent="0">
               <a:buNone/>
             </a:pPr>
             <a:r>
@@ -10671,7 +10413,7 @@
           <a:bodyPr wrap="square" lIns="0" tIns="0" rIns="0" bIns="0" rtlCol="0" anchor="ctr"/>
           <a:lstStyle/>
           <a:p>
-            <a:pPr indent="0" marL="0">
+            <a:pPr marL="0" indent="0">
               <a:buNone/>
             </a:pPr>
             <a:r>
@@ -10713,7 +10455,7 @@
             <a:prstDash val="solid"/>
           </a:ln>
           <a:effectLst>
-            <a:outerShdw sx="100000" sy="100000" kx="0" ky="0" algn="bl" rotWithShape="0" blurRad="101600" dist="38100" dir="8100000">
+            <a:outerShdw blurRad="101600" dist="38100" dir="8100000" algn="bl" rotWithShape="0">
               <a:srgbClr val="9EAFC0">
                 <a:alpha val="14000"/>
               </a:srgbClr>
@@ -10767,7 +10509,7 @@
           <a:bodyPr wrap="square" lIns="0" tIns="0" rIns="0" bIns="0" rtlCol="0" anchor="ctr"/>
           <a:lstStyle/>
           <a:p>
-            <a:pPr indent="0" marL="0">
+            <a:pPr marL="0" indent="0">
               <a:buNone/>
             </a:pPr>
             <a:r>
@@ -10806,7 +10548,7 @@
           <a:bodyPr wrap="square" lIns="0" tIns="0" rIns="0" bIns="0" rtlCol="0" anchor="ctr"/>
           <a:lstStyle/>
           <a:p>
-            <a:pPr indent="0" marL="0">
+            <a:pPr marL="0" indent="0">
               <a:buNone/>
             </a:pPr>
             <a:r>
@@ -10893,7 +10635,7 @@
           <a:bodyPr wrap="square" lIns="0" tIns="0" rIns="0" bIns="0" rtlCol="0" anchor="ctr"/>
           <a:lstStyle/>
           <a:p>
-            <a:pPr indent="0" marL="0">
+            <a:pPr marL="0" indent="0">
               <a:buNone/>
             </a:pPr>
             <a:r>
@@ -10932,7 +10674,7 @@
           <a:bodyPr wrap="square" lIns="0" tIns="0" rIns="0" bIns="0" rtlCol="0" anchor="ctr"/>
           <a:lstStyle/>
           <a:p>
-            <a:pPr indent="0" marL="0">
+            <a:pPr marL="0" indent="0">
               <a:buNone/>
             </a:pPr>
             <a:r>
@@ -10996,7 +10738,7 @@
           <a:bodyPr wrap="square" lIns="0" tIns="0" rIns="0" bIns="0" rtlCol="0" anchor="ctr"/>
           <a:lstStyle/>
           <a:p>
-            <a:pPr indent="0" marL="0">
+            <a:pPr marL="0" indent="0">
               <a:buNone/>
             </a:pPr>
             <a:r>
@@ -11038,7 +10780,7 @@
             <a:prstDash val="solid"/>
           </a:ln>
           <a:effectLst>
-            <a:outerShdw sx="100000" sy="100000" kx="0" ky="0" algn="bl" rotWithShape="0" blurRad="101600" dist="38100" dir="8100000">
+            <a:outerShdw blurRad="101600" dist="38100" dir="8100000" algn="bl" rotWithShape="0">
               <a:srgbClr val="9EAFC0">
                 <a:alpha val="14000"/>
               </a:srgbClr>
@@ -11092,7 +10834,7 @@
           <a:bodyPr wrap="square" lIns="0" tIns="0" rIns="0" bIns="0" rtlCol="0" anchor="ctr"/>
           <a:lstStyle/>
           <a:p>
-            <a:pPr indent="0" marL="0">
+            <a:pPr marL="0" indent="0">
               <a:buNone/>
             </a:pPr>
             <a:r>
@@ -11131,7 +10873,7 @@
           <a:bodyPr wrap="square" lIns="0" tIns="0" rIns="0" bIns="0" rtlCol="0" anchor="ctr"/>
           <a:lstStyle/>
           <a:p>
-            <a:pPr indent="0" marL="0">
+            <a:pPr marL="0" indent="0">
               <a:buNone/>
             </a:pPr>
             <a:r>
@@ -11218,7 +10960,7 @@
           <a:bodyPr wrap="square" lIns="0" tIns="0" rIns="0" bIns="0" rtlCol="0" anchor="ctr"/>
           <a:lstStyle/>
           <a:p>
-            <a:pPr indent="0" marL="0">
+            <a:pPr marL="0" indent="0">
               <a:buNone/>
             </a:pPr>
             <a:r>
@@ -11257,7 +10999,7 @@
           <a:bodyPr wrap="square" lIns="0" tIns="0" rIns="0" bIns="0" rtlCol="0" anchor="ctr"/>
           <a:lstStyle/>
           <a:p>
-            <a:pPr indent="0" marL="0">
+            <a:pPr marL="0" indent="0">
               <a:buNone/>
             </a:pPr>
             <a:r>
@@ -11321,7 +11063,7 @@
           <a:bodyPr wrap="square" lIns="0" tIns="0" rIns="0" bIns="0" rtlCol="0" anchor="ctr"/>
           <a:lstStyle/>
           <a:p>
-            <a:pPr indent="0" marL="0">
+            <a:pPr marL="0" indent="0">
               <a:buNone/>
             </a:pPr>
             <a:r>
@@ -11363,7 +11105,7 @@
             <a:prstDash val="solid"/>
           </a:ln>
           <a:effectLst>
-            <a:outerShdw sx="100000" sy="100000" kx="0" ky="0" algn="bl" rotWithShape="0" blurRad="101600" dist="38100" dir="8100000">
+            <a:outerShdw blurRad="101600" dist="38100" dir="8100000" algn="bl" rotWithShape="0">
               <a:srgbClr val="9EAFC0">
                 <a:alpha val="14000"/>
               </a:srgbClr>
@@ -11417,7 +11159,7 @@
           <a:bodyPr wrap="square" lIns="0" tIns="0" rIns="0" bIns="0" rtlCol="0" anchor="ctr"/>
           <a:lstStyle/>
           <a:p>
-            <a:pPr indent="0" marL="0">
+            <a:pPr marL="0" indent="0">
               <a:buNone/>
             </a:pPr>
             <a:r>
@@ -11456,7 +11198,7 @@
           <a:bodyPr wrap="square" lIns="0" tIns="0" rIns="0" bIns="0" rtlCol="0" anchor="ctr"/>
           <a:lstStyle/>
           <a:p>
-            <a:pPr indent="0" marL="0">
+            <a:pPr marL="0" indent="0">
               <a:buNone/>
             </a:pPr>
             <a:r>
@@ -11543,7 +11285,7 @@
           <a:bodyPr wrap="square" lIns="0" tIns="0" rIns="0" bIns="0" rtlCol="0" anchor="ctr"/>
           <a:lstStyle/>
           <a:p>
-            <a:pPr indent="0" marL="0">
+            <a:pPr marL="0" indent="0">
               <a:buNone/>
             </a:pPr>
             <a:r>
@@ -11582,7 +11324,7 @@
           <a:bodyPr wrap="square" lIns="0" tIns="0" rIns="0" bIns="0" rtlCol="0" anchor="ctr"/>
           <a:lstStyle/>
           <a:p>
-            <a:pPr indent="0" marL="0">
+            <a:pPr marL="0" indent="0">
               <a:buNone/>
             </a:pPr>
             <a:r>
@@ -11646,7 +11388,7 @@
           <a:bodyPr wrap="square" lIns="0" tIns="0" rIns="0" bIns="0" rtlCol="0" anchor="ctr"/>
           <a:lstStyle/>
           <a:p>
-            <a:pPr indent="0" marL="0">
+            <a:pPr marL="0" indent="0">
               <a:buNone/>
             </a:pPr>
             <a:r>
@@ -11710,7 +11452,7 @@
           <a:bodyPr wrap="square" lIns="0" tIns="0" rIns="0" bIns="0" rtlCol="0" anchor="ctr"/>
           <a:lstStyle/>
           <a:p>
-            <a:pPr indent="0" marL="0">
+            <a:pPr marL="0" indent="0">
               <a:buNone/>
             </a:pPr>
             <a:r>
@@ -11744,6 +11486,7 @@
         <a:solidFill>
           <a:srgbClr val="F8FAFB"/>
         </a:solidFill>
+        <a:effectLst/>
       </p:bgPr>
     </p:bg>
     <p:spTree>
@@ -11806,7 +11549,7 @@
           <a:bodyPr wrap="square" lIns="0" tIns="0" rIns="0" bIns="0" rtlCol="0" anchor="ctr"/>
           <a:lstStyle/>
           <a:p>
-            <a:pPr indent="0" marL="0">
+            <a:pPr marL="0" indent="0">
               <a:buNone/>
             </a:pPr>
             <a:r>
@@ -11845,7 +11588,7 @@
           <a:bodyPr wrap="square" lIns="0" tIns="0" rIns="0" bIns="0" rtlCol="0" anchor="ctr"/>
           <a:lstStyle/>
           <a:p>
-            <a:pPr indent="0" marL="0">
+            <a:pPr marL="0" indent="0">
               <a:buNone/>
             </a:pPr>
             <a:r>
@@ -11884,7 +11627,7 @@
           <a:bodyPr wrap="square" lIns="0" tIns="0" rIns="0" bIns="0" rtlCol="0" anchor="ctr"/>
           <a:lstStyle/>
           <a:p>
-            <a:pPr indent="0" marL="0">
+            <a:pPr marL="0" indent="0">
               <a:buNone/>
             </a:pPr>
             <a:r>
@@ -11923,7 +11666,7 @@
           <a:bodyPr wrap="square" lIns="0" tIns="0" rIns="0" bIns="0" rtlCol="0" anchor="ctr"/>
           <a:lstStyle/>
           <a:p>
-            <a:pPr indent="0" marL="0">
+            <a:pPr marL="0" indent="0">
               <a:buNone/>
             </a:pPr>
             <a:r>
@@ -11962,7 +11705,7 @@
           <a:bodyPr wrap="square" lIns="0" tIns="0" rIns="0" bIns="0" rtlCol="0" anchor="ctr"/>
           <a:lstStyle/>
           <a:p>
-            <a:pPr indent="0" marL="0">
+            <a:pPr marL="0" indent="0">
               <a:buNone/>
             </a:pPr>
             <a:r>
@@ -12004,7 +11747,7 @@
             <a:prstDash val="solid"/>
           </a:ln>
           <a:effectLst>
-            <a:outerShdw sx="100000" sy="100000" kx="0" ky="0" algn="bl" rotWithShape="0" blurRad="101600" dist="38100" dir="8100000">
+            <a:outerShdw blurRad="101600" dist="38100" dir="8100000" algn="bl" rotWithShape="0">
               <a:srgbClr val="9EAFC0">
                 <a:alpha val="14000"/>
               </a:srgbClr>
@@ -12058,7 +11801,7 @@
           <a:bodyPr wrap="square" lIns="0" tIns="0" rIns="0" bIns="0" rtlCol="0" anchor="ctr"/>
           <a:lstStyle/>
           <a:p>
-            <a:pPr indent="0" marL="0">
+            <a:pPr marL="0" indent="0">
               <a:buNone/>
             </a:pPr>
             <a:r>
@@ -12122,7 +11865,7 @@
           <a:bodyPr wrap="square" lIns="0" tIns="0" rIns="0" bIns="0" rtlCol="0" anchor="ctr"/>
           <a:lstStyle/>
           <a:p>
-            <a:pPr algn="ctr" indent="0" marL="0">
+            <a:pPr marL="0" indent="0" algn="ctr">
               <a:buNone/>
             </a:pPr>
             <a:r>
@@ -12161,7 +11904,7 @@
           <a:bodyPr wrap="square" lIns="0" tIns="0" rIns="0" bIns="0" rtlCol="0" anchor="ctr"/>
           <a:lstStyle/>
           <a:p>
-            <a:pPr algn="ctr" indent="0" marL="0">
+            <a:pPr marL="0" indent="0" algn="ctr">
               <a:buNone/>
             </a:pPr>
             <a:r>
@@ -12225,7 +11968,7 @@
           <a:bodyPr wrap="square" lIns="0" tIns="0" rIns="0" bIns="0" rtlCol="0" anchor="ctr"/>
           <a:lstStyle/>
           <a:p>
-            <a:pPr algn="ctr" indent="0" marL="0">
+            <a:pPr marL="0" indent="0" algn="ctr">
               <a:buNone/>
             </a:pPr>
             <a:r>
@@ -12264,7 +12007,7 @@
           <a:bodyPr wrap="square" lIns="0" tIns="0" rIns="0" bIns="0" rtlCol="0" anchor="ctr"/>
           <a:lstStyle/>
           <a:p>
-            <a:pPr algn="ctr" indent="0" marL="0">
+            <a:pPr marL="0" indent="0" algn="ctr">
               <a:buNone/>
             </a:pPr>
             <a:r>
@@ -12328,7 +12071,7 @@
           <a:bodyPr wrap="square" lIns="0" tIns="0" rIns="0" bIns="0" rtlCol="0" anchor="ctr"/>
           <a:lstStyle/>
           <a:p>
-            <a:pPr algn="ctr" indent="0" marL="0">
+            <a:pPr marL="0" indent="0" algn="ctr">
               <a:buNone/>
             </a:pPr>
             <a:r>
@@ -12367,7 +12110,7 @@
           <a:bodyPr wrap="square" lIns="0" tIns="0" rIns="0" bIns="0" rtlCol="0" anchor="ctr"/>
           <a:lstStyle/>
           <a:p>
-            <a:pPr algn="ctr" indent="0" marL="0">
+            <a:pPr marL="0" indent="0" algn="ctr">
               <a:buNone/>
             </a:pPr>
             <a:r>
@@ -12409,7 +12152,7 @@
             <a:prstDash val="solid"/>
           </a:ln>
           <a:effectLst>
-            <a:outerShdw sx="100000" sy="100000" kx="0" ky="0" algn="bl" rotWithShape="0" blurRad="101600" dist="38100" dir="8100000">
+            <a:outerShdw blurRad="101600" dist="38100" dir="8100000" algn="bl" rotWithShape="0">
               <a:srgbClr val="9EAFC0">
                 <a:alpha val="14000"/>
               </a:srgbClr>
@@ -12463,7 +12206,7 @@
           <a:bodyPr wrap="square" lIns="0" tIns="0" rIns="0" bIns="0" rtlCol="0" anchor="ctr"/>
           <a:lstStyle/>
           <a:p>
-            <a:pPr indent="0" marL="0">
+            <a:pPr marL="0" indent="0">
               <a:buNone/>
             </a:pPr>
             <a:r>
@@ -12527,7 +12270,7 @@
           <a:bodyPr wrap="square" lIns="0" tIns="0" rIns="0" bIns="0" rtlCol="0" anchor="ctr"/>
           <a:lstStyle/>
           <a:p>
-            <a:pPr algn="ctr" indent="0" marL="0">
+            <a:pPr marL="0" indent="0" algn="ctr">
               <a:buNone/>
             </a:pPr>
             <a:r>
@@ -12566,7 +12309,7 @@
           <a:bodyPr wrap="square" lIns="0" tIns="0" rIns="0" bIns="0" rtlCol="0" anchor="ctr"/>
           <a:lstStyle/>
           <a:p>
-            <a:pPr algn="ctr" indent="0" marL="0">
+            <a:pPr marL="0" indent="0" algn="ctr">
               <a:buNone/>
             </a:pPr>
             <a:r>
@@ -12605,7 +12348,7 @@
           <a:bodyPr wrap="square" lIns="0" tIns="0" rIns="0" bIns="0" rtlCol="0" anchor="ctr"/>
           <a:lstStyle/>
           <a:p>
-            <a:pPr algn="ctr" indent="0" marL="0">
+            <a:pPr marL="0" indent="0" algn="ctr">
               <a:buNone/>
             </a:pPr>
             <a:r>
@@ -12669,7 +12412,7 @@
           <a:bodyPr wrap="square" lIns="0" tIns="0" rIns="0" bIns="0" rtlCol="0" anchor="ctr"/>
           <a:lstStyle/>
           <a:p>
-            <a:pPr algn="ctr" indent="0" marL="0">
+            <a:pPr marL="0" indent="0" algn="ctr">
               <a:buNone/>
             </a:pPr>
             <a:r>
@@ -12708,7 +12451,7 @@
           <a:bodyPr wrap="square" lIns="0" tIns="0" rIns="0" bIns="0" rtlCol="0" anchor="ctr"/>
           <a:lstStyle/>
           <a:p>
-            <a:pPr algn="ctr" indent="0" marL="0">
+            <a:pPr marL="0" indent="0" algn="ctr">
               <a:buNone/>
             </a:pPr>
             <a:r>
@@ -12747,7 +12490,7 @@
           <a:bodyPr wrap="square" lIns="0" tIns="0" rIns="0" bIns="0" rtlCol="0" anchor="ctr"/>
           <a:lstStyle/>
           <a:p>
-            <a:pPr algn="ctr" indent="0" marL="0">
+            <a:pPr marL="0" indent="0" algn="ctr">
               <a:buNone/>
             </a:pPr>
             <a:r>
@@ -12786,7 +12529,7 @@
           <a:bodyPr wrap="square" lIns="0" tIns="0" rIns="0" bIns="0" rtlCol="0" anchor="ctr"/>
           <a:lstStyle/>
           <a:p>
-            <a:pPr algn="ctr" indent="0" marL="0">
+            <a:pPr marL="0" indent="0" algn="ctr">
               <a:buNone/>
             </a:pPr>
             <a:r>
@@ -12828,7 +12571,7 @@
             <a:prstDash val="solid"/>
           </a:ln>
           <a:effectLst>
-            <a:outerShdw sx="100000" sy="100000" kx="0" ky="0" algn="bl" rotWithShape="0" blurRad="101600" dist="38100" dir="8100000">
+            <a:outerShdw blurRad="101600" dist="38100" dir="8100000" algn="bl" rotWithShape="0">
               <a:srgbClr val="9EAFC0">
                 <a:alpha val="14000"/>
               </a:srgbClr>
@@ -12882,7 +12625,7 @@
           <a:bodyPr wrap="square" lIns="0" tIns="0" rIns="0" bIns="0" rtlCol="0" anchor="ctr"/>
           <a:lstStyle/>
           <a:p>
-            <a:pPr indent="0" marL="0">
+            <a:pPr marL="0" indent="0">
               <a:buNone/>
             </a:pPr>
             <a:r>
@@ -12946,7 +12689,7 @@
           <a:bodyPr wrap="square" lIns="0" tIns="0" rIns="0" bIns="0" rtlCol="0" anchor="ctr"/>
           <a:lstStyle/>
           <a:p>
-            <a:pPr algn="ctr" indent="0" marL="0">
+            <a:pPr marL="0" indent="0" algn="ctr">
               <a:buNone/>
             </a:pPr>
             <a:r>
@@ -12985,7 +12728,7 @@
           <a:bodyPr wrap="square" lIns="0" tIns="0" rIns="0" bIns="0" rtlCol="0" anchor="ctr"/>
           <a:lstStyle/>
           <a:p>
-            <a:pPr algn="ctr" indent="0" marL="0">
+            <a:pPr marL="0" indent="0" algn="ctr">
               <a:buNone/>
             </a:pPr>
             <a:r>
@@ -13049,7 +12792,7 @@
           <a:bodyPr wrap="square" lIns="0" tIns="0" rIns="0" bIns="0" rtlCol="0" anchor="ctr"/>
           <a:lstStyle/>
           <a:p>
-            <a:pPr algn="ctr" indent="0" marL="0">
+            <a:pPr marL="0" indent="0" algn="ctr">
               <a:buNone/>
             </a:pPr>
             <a:r>
@@ -13088,7 +12831,7 @@
           <a:bodyPr wrap="square" lIns="0" tIns="0" rIns="0" bIns="0" rtlCol="0" anchor="ctr"/>
           <a:lstStyle/>
           <a:p>
-            <a:pPr algn="ctr" indent="0" marL="0">
+            <a:pPr marL="0" indent="0" algn="ctr">
               <a:buNone/>
             </a:pPr>
             <a:r>
@@ -13152,7 +12895,7 @@
           <a:bodyPr wrap="square" lIns="0" tIns="0" rIns="0" bIns="0" rtlCol="0" anchor="ctr"/>
           <a:lstStyle/>
           <a:p>
-            <a:pPr indent="0" marL="0">
+            <a:pPr marL="0" indent="0">
               <a:buNone/>
             </a:pPr>
             <a:r>
@@ -13191,7 +12934,7 @@
           <a:bodyPr wrap="square" lIns="0" tIns="0" rIns="0" bIns="0" rtlCol="0" anchor="ctr"/>
           <a:lstStyle/>
           <a:p>
-            <a:pPr indent="0" marL="0">
+            <a:pPr marL="0" indent="0">
               <a:buNone/>
             </a:pPr>
             <a:r>
@@ -13255,7 +12998,7 @@
           <a:bodyPr wrap="square" lIns="0" tIns="0" rIns="0" bIns="0" rtlCol="0" anchor="ctr"/>
           <a:lstStyle/>
           <a:p>
-            <a:pPr indent="0" marL="0">
+            <a:pPr marL="0" indent="0">
               <a:buNone/>
             </a:pPr>
             <a:r>
@@ -13289,6 +13032,7 @@
         <a:solidFill>
           <a:srgbClr val="FFFFFF"/>
         </a:solidFill>
+        <a:effectLst/>
       </p:bgPr>
     </p:bg>
     <p:spTree>
@@ -13351,7 +13095,7 @@
           <a:bodyPr wrap="square" lIns="0" tIns="0" rIns="0" bIns="0" rtlCol="0" anchor="ctr"/>
           <a:lstStyle/>
           <a:p>
-            <a:pPr indent="0" marL="0">
+            <a:pPr marL="0" indent="0">
               <a:buNone/>
             </a:pPr>
             <a:r>
@@ -13390,7 +13134,7 @@
           <a:bodyPr wrap="square" lIns="0" tIns="0" rIns="0" bIns="0" rtlCol="0" anchor="ctr"/>
           <a:lstStyle/>
           <a:p>
-            <a:pPr indent="0" marL="0">
+            <a:pPr marL="0" indent="0">
               <a:buNone/>
             </a:pPr>
             <a:r>
@@ -13429,7 +13173,7 @@
           <a:bodyPr wrap="square" lIns="0" tIns="0" rIns="0" bIns="0" rtlCol="0" anchor="ctr"/>
           <a:lstStyle/>
           <a:p>
-            <a:pPr indent="0" marL="0">
+            <a:pPr marL="0" indent="0">
               <a:buNone/>
             </a:pPr>
             <a:r>
@@ -13471,7 +13215,7 @@
             <a:prstDash val="solid"/>
           </a:ln>
           <a:effectLst>
-            <a:outerShdw sx="100000" sy="100000" kx="0" ky="0" algn="bl" rotWithShape="0" blurRad="101600" dist="38100" dir="8100000">
+            <a:outerShdw blurRad="101600" dist="38100" dir="8100000" algn="bl" rotWithShape="0">
               <a:srgbClr val="9EAFC0">
                 <a:alpha val="14000"/>
               </a:srgbClr>
@@ -13550,7 +13294,7 @@
           <a:bodyPr wrap="square" lIns="0" tIns="0" rIns="0" bIns="0" rtlCol="0" anchor="ctr"/>
           <a:lstStyle/>
           <a:p>
-            <a:pPr indent="0" marL="0">
+            <a:pPr marL="0" indent="0">
               <a:buNone/>
             </a:pPr>
             <a:r>
@@ -13589,7 +13333,7 @@
           <a:bodyPr wrap="square" lIns="0" tIns="0" rIns="0" bIns="0" rtlCol="0" anchor="ctr"/>
           <a:lstStyle/>
           <a:p>
-            <a:pPr indent="0" marL="0">
+            <a:pPr marL="0" indent="0">
               <a:lnSpc>
                 <a:spcPct val="130000"/>
               </a:lnSpc>
@@ -13609,7 +13353,7 @@
             <a:endParaRPr lang="en-US" sz="1000" dirty="0"/>
           </a:p>
           <a:p>
-            <a:pPr indent="0" marL="0">
+            <a:pPr marL="0" indent="0">
               <a:lnSpc>
                 <a:spcPct val="130000"/>
               </a:lnSpc>
@@ -13674,7 +13418,7 @@
           <a:bodyPr wrap="square" lIns="0" tIns="0" rIns="0" bIns="0" rtlCol="0" anchor="ctr"/>
           <a:lstStyle/>
           <a:p>
-            <a:pPr indent="0" marL="0">
+            <a:pPr marL="0" indent="0">
               <a:buNone/>
             </a:pPr>
             <a:r>
@@ -13716,7 +13460,7 @@
             <a:prstDash val="solid"/>
           </a:ln>
           <a:effectLst>
-            <a:outerShdw sx="100000" sy="100000" kx="0" ky="0" algn="bl" rotWithShape="0" blurRad="101600" dist="38100" dir="8100000">
+            <a:outerShdw blurRad="101600" dist="38100" dir="8100000" algn="bl" rotWithShape="0">
               <a:srgbClr val="9EAFC0">
                 <a:alpha val="14000"/>
               </a:srgbClr>
@@ -13795,7 +13539,7 @@
           <a:bodyPr wrap="square" lIns="0" tIns="0" rIns="0" bIns="0" rtlCol="0" anchor="ctr"/>
           <a:lstStyle/>
           <a:p>
-            <a:pPr indent="0" marL="0">
+            <a:pPr marL="0" indent="0">
               <a:buNone/>
             </a:pPr>
             <a:r>
@@ -13834,7 +13578,7 @@
           <a:bodyPr wrap="square" lIns="0" tIns="0" rIns="0" bIns="0" rtlCol="0" anchor="ctr"/>
           <a:lstStyle/>
           <a:p>
-            <a:pPr indent="0" marL="0">
+            <a:pPr marL="0" indent="0">
               <a:lnSpc>
                 <a:spcPct val="130000"/>
               </a:lnSpc>
@@ -13854,7 +13598,7 @@
             <a:endParaRPr lang="en-US" sz="1000" dirty="0"/>
           </a:p>
           <a:p>
-            <a:pPr indent="0" marL="0">
+            <a:pPr marL="0" indent="0">
               <a:lnSpc>
                 <a:spcPct val="130000"/>
               </a:lnSpc>
@@ -13919,7 +13663,7 @@
           <a:bodyPr wrap="square" lIns="0" tIns="0" rIns="0" bIns="0" rtlCol="0" anchor="ctr"/>
           <a:lstStyle/>
           <a:p>
-            <a:pPr indent="0" marL="0">
+            <a:pPr marL="0" indent="0">
               <a:buNone/>
             </a:pPr>
             <a:r>
@@ -13961,7 +13705,7 @@
             <a:prstDash val="solid"/>
           </a:ln>
           <a:effectLst>
-            <a:outerShdw sx="100000" sy="100000" kx="0" ky="0" algn="bl" rotWithShape="0" blurRad="101600" dist="38100" dir="8100000">
+            <a:outerShdw blurRad="101600" dist="38100" dir="8100000" algn="bl" rotWithShape="0">
               <a:srgbClr val="9EAFC0">
                 <a:alpha val="14000"/>
               </a:srgbClr>
@@ -14040,7 +13784,7 @@
           <a:bodyPr wrap="square" lIns="0" tIns="0" rIns="0" bIns="0" rtlCol="0" anchor="ctr"/>
           <a:lstStyle/>
           <a:p>
-            <a:pPr indent="0" marL="0">
+            <a:pPr marL="0" indent="0">
               <a:buNone/>
             </a:pPr>
             <a:r>
@@ -14079,7 +13823,7 @@
           <a:bodyPr wrap="square" lIns="0" tIns="0" rIns="0" bIns="0" rtlCol="0" anchor="ctr"/>
           <a:lstStyle/>
           <a:p>
-            <a:pPr indent="0" marL="0">
+            <a:pPr marL="0" indent="0">
               <a:lnSpc>
                 <a:spcPct val="130000"/>
               </a:lnSpc>
@@ -14099,7 +13843,7 @@
             <a:endParaRPr lang="en-US" sz="1000" dirty="0"/>
           </a:p>
           <a:p>
-            <a:pPr indent="0" marL="0">
+            <a:pPr marL="0" indent="0">
               <a:lnSpc>
                 <a:spcPct val="130000"/>
               </a:lnSpc>
@@ -14164,7 +13908,7 @@
           <a:bodyPr wrap="square" lIns="0" tIns="0" rIns="0" bIns="0" rtlCol="0" anchor="ctr"/>
           <a:lstStyle/>
           <a:p>
-            <a:pPr indent="0" marL="0">
+            <a:pPr marL="0" indent="0">
               <a:buNone/>
             </a:pPr>
             <a:r>
@@ -14190,8 +13934,8 @@
         </p:nvSpPr>
         <p:spPr>
           <a:xfrm>
-            <a:off x="320040" y="3904488"/>
-            <a:ext cx="8503920" cy="640080"/>
+            <a:off x="274320" y="4366260"/>
+            <a:ext cx="8503920" cy="333756"/>
           </a:xfrm>
           <a:prstGeom prst="rect">
             <a:avLst/>
@@ -14228,7 +13972,7 @@
           <a:bodyPr wrap="square" lIns="0" tIns="0" rIns="0" bIns="0" rtlCol="0" anchor="ctr"/>
           <a:lstStyle/>
           <a:p>
-            <a:pPr indent="0" marL="0">
+            <a:pPr marL="0" indent="0">
               <a:buNone/>
             </a:pPr>
             <a:r>
@@ -14254,7 +13998,7 @@
         </p:nvSpPr>
         <p:spPr>
           <a:xfrm>
-            <a:off x="1737360" y="3977640"/>
+            <a:off x="1719072" y="4251960"/>
             <a:ext cx="6903720" cy="502920"/>
           </a:xfrm>
           <a:prstGeom prst="rect">
@@ -14267,7 +14011,7 @@
           <a:bodyPr wrap="square" lIns="0" tIns="0" rIns="0" bIns="0" rtlCol="0" anchor="ctr"/>
           <a:lstStyle/>
           <a:p>
-            <a:pPr indent="0" marL="0">
+            <a:pPr marL="0" indent="0">
               <a:buNone/>
             </a:pPr>
             <a:r>
@@ -14331,7 +14075,7 @@
           <a:bodyPr wrap="square" lIns="0" tIns="0" rIns="0" bIns="0" rtlCol="0" anchor="ctr"/>
           <a:lstStyle/>
           <a:p>
-            <a:pPr indent="0" marL="0">
+            <a:pPr marL="0" indent="0">
               <a:buNone/>
             </a:pPr>
             <a:r>
@@ -14365,6 +14109,7 @@
         <a:solidFill>
           <a:srgbClr val="F8FAFB"/>
         </a:solidFill>
+        <a:effectLst/>
       </p:bgPr>
     </p:bg>
     <p:spTree>
@@ -14427,7 +14172,7 @@
           <a:bodyPr wrap="square" lIns="0" tIns="0" rIns="0" bIns="0" rtlCol="0" anchor="ctr"/>
           <a:lstStyle/>
           <a:p>
-            <a:pPr indent="0" marL="0">
+            <a:pPr marL="0" indent="0">
               <a:buNone/>
             </a:pPr>
             <a:r>
@@ -14466,7 +14211,7 @@
           <a:bodyPr wrap="square" lIns="0" tIns="0" rIns="0" bIns="0" rtlCol="0" anchor="ctr"/>
           <a:lstStyle/>
           <a:p>
-            <a:pPr indent="0" marL="0">
+            <a:pPr marL="0" indent="0">
               <a:buNone/>
             </a:pPr>
             <a:r>
@@ -14505,7 +14250,7 @@
           <a:bodyPr wrap="square" lIns="0" tIns="0" rIns="0" bIns="0" rtlCol="0" anchor="ctr"/>
           <a:lstStyle/>
           <a:p>
-            <a:pPr indent="0" marL="0">
+            <a:pPr marL="0" indent="0">
               <a:buNone/>
             </a:pPr>
             <a:r>
@@ -14547,7 +14292,7 @@
             <a:prstDash val="solid"/>
           </a:ln>
           <a:effectLst>
-            <a:outerShdw sx="100000" sy="100000" kx="0" ky="0" algn="bl" rotWithShape="0" blurRad="101600" dist="38100" dir="8100000">
+            <a:outerShdw blurRad="101600" dist="38100" dir="8100000" algn="bl" rotWithShape="0">
               <a:srgbClr val="9EAFC0">
                 <a:alpha val="14000"/>
               </a:srgbClr>
@@ -14601,7 +14346,7 @@
           <a:bodyPr wrap="square" lIns="0" tIns="0" rIns="0" bIns="0" rtlCol="0" anchor="ctr"/>
           <a:lstStyle/>
           <a:p>
-            <a:pPr indent="0" marL="0">
+            <a:pPr marL="0" indent="0">
               <a:buNone/>
             </a:pPr>
             <a:r>
@@ -14640,7 +14385,7 @@
           <a:bodyPr wrap="square" lIns="0" tIns="0" rIns="0" bIns="0" rtlCol="0" anchor="ctr"/>
           <a:lstStyle/>
           <a:p>
-            <a:pPr indent="0" marL="0">
+            <a:pPr marL="0" indent="0">
               <a:buNone/>
             </a:pPr>
             <a:r>
@@ -14654,9 +14399,6 @@
               </a:rPr>
               <a:t>OLS minimiza</a:t>
             </a:r>
-            <a:pPr indent="0" marL="0">
-              <a:buNone/>
-            </a:pPr>
             <a:r>
               <a:rPr lang="en-US" sz="1200" b="1" dirty="0">
                 <a:solidFill>
@@ -14693,7 +14435,7 @@
           <a:bodyPr wrap="square" lIns="0" tIns="0" rIns="0" bIns="0" rtlCol="0" anchor="ctr"/>
           <a:lstStyle/>
           <a:p>
-            <a:pPr indent="0" marL="0">
+            <a:pPr marL="0" indent="0">
               <a:lnSpc>
                 <a:spcPct val="130000"/>
               </a:lnSpc>
@@ -14713,7 +14455,7 @@
             <a:endParaRPr lang="en-US" sz="1050" dirty="0"/>
           </a:p>
           <a:p>
-            <a:pPr indent="0" marL="0">
+            <a:pPr marL="0" indent="0">
               <a:lnSpc>
                 <a:spcPct val="130000"/>
               </a:lnSpc>
@@ -14780,7 +14522,7 @@
           <a:bodyPr wrap="square" lIns="0" tIns="0" rIns="0" bIns="0" rtlCol="0" anchor="ctr"/>
           <a:lstStyle/>
           <a:p>
-            <a:pPr indent="0" marL="0">
+            <a:pPr marL="0" indent="0">
               <a:buNone/>
             </a:pPr>
             <a:r>
@@ -14819,7 +14561,7 @@
           <a:bodyPr wrap="square" lIns="0" tIns="0" rIns="0" bIns="0" rtlCol="0" anchor="ctr"/>
           <a:lstStyle/>
           <a:p>
-            <a:pPr indent="0" marL="0">
+            <a:pPr marL="0" indent="0">
               <a:lnSpc>
                 <a:spcPct val="130000"/>
               </a:lnSpc>
@@ -14839,7 +14581,7 @@
             <a:endParaRPr lang="en-US" sz="1050" dirty="0"/>
           </a:p>
           <a:p>
-            <a:pPr indent="0" marL="0">
+            <a:pPr marL="0" indent="0">
               <a:lnSpc>
                 <a:spcPct val="130000"/>
               </a:lnSpc>
@@ -14881,7 +14623,7 @@
           <a:bodyPr wrap="square" lIns="0" tIns="0" rIns="0" bIns="0" rtlCol="0" anchor="ctr"/>
           <a:lstStyle/>
           <a:p>
-            <a:pPr indent="0" marL="0">
+            <a:pPr marL="0" indent="0">
               <a:buNone/>
             </a:pPr>
             <a:r>
@@ -14920,7 +14662,7 @@
           <a:bodyPr wrap="square" lIns="0" tIns="0" rIns="0" bIns="0" rtlCol="0" anchor="ctr"/>
           <a:lstStyle/>
           <a:p>
-            <a:pPr indent="0" marL="0">
+            <a:pPr marL="0" indent="0">
               <a:buNone/>
             </a:pPr>
             <a:r>
@@ -14962,7 +14704,7 @@
             <a:prstDash val="solid"/>
           </a:ln>
           <a:effectLst>
-            <a:outerShdw sx="100000" sy="100000" kx="0" ky="0" algn="bl" rotWithShape="0" blurRad="101600" dist="38100" dir="8100000">
+            <a:outerShdw blurRad="101600" dist="38100" dir="8100000" algn="bl" rotWithShape="0">
               <a:srgbClr val="9EAFC0">
                 <a:alpha val="14000"/>
               </a:srgbClr>
@@ -15016,7 +14758,7 @@
           <a:bodyPr wrap="square" lIns="0" tIns="0" rIns="0" bIns="0" rtlCol="0" anchor="ctr"/>
           <a:lstStyle/>
           <a:p>
-            <a:pPr indent="0" marL="0">
+            <a:pPr marL="0" indent="0">
               <a:buNone/>
             </a:pPr>
             <a:r>
@@ -15105,7 +14847,7 @@
           <a:bodyPr wrap="square" lIns="0" tIns="0" rIns="0" bIns="0" rtlCol="0" anchor="ctr"/>
           <a:lstStyle/>
           <a:p>
-            <a:pPr indent="0" marL="0">
+            <a:pPr marL="0" indent="0">
               <a:buNone/>
             </a:pPr>
             <a:r>
@@ -15144,7 +14886,7 @@
           <a:bodyPr wrap="square" lIns="0" tIns="0" rIns="0" bIns="0" rtlCol="0" anchor="ctr"/>
           <a:lstStyle/>
           <a:p>
-            <a:pPr indent="0" marL="0">
+            <a:pPr marL="0" indent="0">
               <a:buNone/>
             </a:pPr>
             <a:r>
@@ -15233,7 +14975,7 @@
           <a:bodyPr wrap="square" lIns="0" tIns="0" rIns="0" bIns="0" rtlCol="0" anchor="ctr"/>
           <a:lstStyle/>
           <a:p>
-            <a:pPr indent="0" marL="0">
+            <a:pPr marL="0" indent="0">
               <a:buNone/>
             </a:pPr>
             <a:r>
@@ -15272,7 +15014,7 @@
           <a:bodyPr wrap="square" lIns="0" tIns="0" rIns="0" bIns="0" rtlCol="0" anchor="ctr"/>
           <a:lstStyle/>
           <a:p>
-            <a:pPr indent="0" marL="0">
+            <a:pPr marL="0" indent="0">
               <a:buNone/>
             </a:pPr>
             <a:r>
@@ -15361,7 +15103,7 @@
           <a:bodyPr wrap="square" lIns="0" tIns="0" rIns="0" bIns="0" rtlCol="0" anchor="ctr"/>
           <a:lstStyle/>
           <a:p>
-            <a:pPr indent="0" marL="0">
+            <a:pPr marL="0" indent="0">
               <a:buNone/>
             </a:pPr>
             <a:r>
@@ -15400,7 +15142,7 @@
           <a:bodyPr wrap="square" lIns="0" tIns="0" rIns="0" bIns="0" rtlCol="0" anchor="ctr"/>
           <a:lstStyle/>
           <a:p>
-            <a:pPr indent="0" marL="0">
+            <a:pPr marL="0" indent="0">
               <a:buNone/>
             </a:pPr>
             <a:r>
@@ -15489,7 +15231,7 @@
           <a:bodyPr wrap="square" lIns="0" tIns="0" rIns="0" bIns="0" rtlCol="0" anchor="ctr"/>
           <a:lstStyle/>
           <a:p>
-            <a:pPr indent="0" marL="0">
+            <a:pPr marL="0" indent="0">
               <a:buNone/>
             </a:pPr>
             <a:r>
@@ -15528,7 +15270,7 @@
           <a:bodyPr wrap="square" lIns="0" tIns="0" rIns="0" bIns="0" rtlCol="0" anchor="ctr"/>
           <a:lstStyle/>
           <a:p>
-            <a:pPr indent="0" marL="0">
+            <a:pPr marL="0" indent="0">
               <a:buNone/>
             </a:pPr>
             <a:r>
@@ -15617,7 +15359,7 @@
           <a:bodyPr wrap="square" lIns="0" tIns="0" rIns="0" bIns="0" rtlCol="0" anchor="ctr"/>
           <a:lstStyle/>
           <a:p>
-            <a:pPr indent="0" marL="0">
+            <a:pPr marL="0" indent="0">
               <a:buNone/>
             </a:pPr>
             <a:r>
@@ -15656,7 +15398,7 @@
           <a:bodyPr wrap="square" lIns="0" tIns="0" rIns="0" bIns="0" rtlCol="0" anchor="ctr"/>
           <a:lstStyle/>
           <a:p>
-            <a:pPr indent="0" marL="0">
+            <a:pPr marL="0" indent="0">
               <a:buNone/>
             </a:pPr>
             <a:r>
@@ -15720,7 +15462,7 @@
           <a:bodyPr wrap="square" lIns="0" tIns="0" rIns="0" bIns="0" rtlCol="0" anchor="ctr"/>
           <a:lstStyle/>
           <a:p>
-            <a:pPr indent="0" marL="0">
+            <a:pPr marL="0" indent="0">
               <a:buNone/>
             </a:pPr>
             <a:r>
@@ -15754,6 +15496,7 @@
         <a:solidFill>
           <a:srgbClr val="FFFFFF"/>
         </a:solidFill>
+        <a:effectLst/>
       </p:bgPr>
     </p:bg>
     <p:spTree>
@@ -15816,7 +15559,7 @@
           <a:bodyPr wrap="square" lIns="0" tIns="0" rIns="0" bIns="0" rtlCol="0" anchor="ctr"/>
           <a:lstStyle/>
           <a:p>
-            <a:pPr indent="0" marL="0">
+            <a:pPr marL="0" indent="0">
               <a:buNone/>
             </a:pPr>
             <a:r>
@@ -15855,7 +15598,7 @@
           <a:bodyPr wrap="square" lIns="0" tIns="0" rIns="0" bIns="0" rtlCol="0" anchor="ctr"/>
           <a:lstStyle/>
           <a:p>
-            <a:pPr indent="0" marL="0">
+            <a:pPr marL="0" indent="0">
               <a:buNone/>
             </a:pPr>
             <a:r>
@@ -15894,7 +15637,7 @@
           <a:bodyPr wrap="square" lIns="0" tIns="0" rIns="0" bIns="0" rtlCol="0" anchor="ctr"/>
           <a:lstStyle/>
           <a:p>
-            <a:pPr indent="0" marL="0">
+            <a:pPr marL="0" indent="0">
               <a:buNone/>
             </a:pPr>
             <a:r>
@@ -15958,7 +15701,7 @@
           <a:bodyPr wrap="square" lIns="0" tIns="0" rIns="0" bIns="0" rtlCol="0" anchor="ctr"/>
           <a:lstStyle/>
           <a:p>
-            <a:pPr indent="0" marL="0">
+            <a:pPr marL="0" indent="0">
               <a:buNone/>
             </a:pPr>
             <a:r>
@@ -16000,7 +15743,7 @@
             <a:prstDash val="solid"/>
           </a:ln>
           <a:effectLst>
-            <a:outerShdw sx="100000" sy="100000" kx="0" ky="0" algn="bl" rotWithShape="0" blurRad="101600" dist="38100" dir="8100000">
+            <a:outerShdw blurRad="101600" dist="38100" dir="8100000" algn="bl" rotWithShape="0">
               <a:srgbClr val="9EAFC0">
                 <a:alpha val="14000"/>
               </a:srgbClr>
@@ -16054,7 +15797,7 @@
           <a:bodyPr wrap="square" lIns="0" tIns="0" rIns="0" bIns="0" rtlCol="0" anchor="ctr"/>
           <a:lstStyle/>
           <a:p>
-            <a:pPr indent="0" marL="0">
+            <a:pPr marL="0" indent="0">
               <a:buNone/>
             </a:pPr>
             <a:r>
@@ -16093,7 +15836,7 @@
           <a:bodyPr wrap="square" lIns="0" tIns="0" rIns="0" bIns="0" rtlCol="0" anchor="ctr"/>
           <a:lstStyle/>
           <a:p>
-            <a:pPr indent="0" marL="0">
+            <a:pPr marL="0" indent="0">
               <a:buNone/>
             </a:pPr>
             <a:r>
@@ -16132,7 +15875,7 @@
           <a:bodyPr wrap="square" lIns="0" tIns="0" rIns="0" bIns="0" rtlCol="0" anchor="ctr"/>
           <a:lstStyle/>
           <a:p>
-            <a:pPr indent="0" marL="0">
+            <a:pPr marL="0" indent="0">
               <a:buNone/>
             </a:pPr>
             <a:r>
@@ -16171,7 +15914,7 @@
           <a:bodyPr wrap="square" lIns="0" tIns="0" rIns="0" bIns="0" rtlCol="0" anchor="ctr"/>
           <a:lstStyle/>
           <a:p>
-            <a:pPr indent="0" marL="0">
+            <a:pPr marL="0" indent="0">
               <a:buNone/>
             </a:pPr>
             <a:r>
@@ -16210,7 +15953,7 @@
           <a:bodyPr wrap="square" lIns="0" tIns="0" rIns="0" bIns="0" rtlCol="0" anchor="ctr"/>
           <a:lstStyle/>
           <a:p>
-            <a:pPr indent="0" marL="0">
+            <a:pPr marL="0" indent="0">
               <a:buNone/>
             </a:pPr>
             <a:r>
@@ -16249,7 +15992,7 @@
           <a:bodyPr wrap="square" lIns="0" tIns="0" rIns="0" bIns="0" rtlCol="0" anchor="ctr"/>
           <a:lstStyle/>
           <a:p>
-            <a:pPr indent="0" marL="0">
+            <a:pPr marL="0" indent="0">
               <a:buNone/>
             </a:pPr>
             <a:r>
@@ -16291,7 +16034,7 @@
             <a:prstDash val="solid"/>
           </a:ln>
           <a:effectLst>
-            <a:outerShdw sx="100000" sy="100000" kx="0" ky="0" algn="bl" rotWithShape="0" blurRad="101600" dist="38100" dir="8100000">
+            <a:outerShdw blurRad="101600" dist="38100" dir="8100000" algn="bl" rotWithShape="0">
               <a:srgbClr val="9EAFC0">
                 <a:alpha val="14000"/>
               </a:srgbClr>
@@ -16345,7 +16088,7 @@
           <a:bodyPr wrap="square" lIns="0" tIns="0" rIns="0" bIns="0" rtlCol="0" anchor="ctr"/>
           <a:lstStyle/>
           <a:p>
-            <a:pPr indent="0" marL="0">
+            <a:pPr marL="0" indent="0">
               <a:buNone/>
             </a:pPr>
             <a:r>
@@ -16384,7 +16127,7 @@
           <a:bodyPr wrap="square" lIns="0" tIns="0" rIns="0" bIns="0" rtlCol="0" anchor="ctr"/>
           <a:lstStyle/>
           <a:p>
-            <a:pPr indent="0" marL="0">
+            <a:pPr marL="0" indent="0">
               <a:buNone/>
             </a:pPr>
             <a:r>
@@ -16423,7 +16166,7 @@
           <a:bodyPr wrap="square" lIns="0" tIns="0" rIns="0" bIns="0" rtlCol="0" anchor="ctr"/>
           <a:lstStyle/>
           <a:p>
-            <a:pPr indent="0" marL="0">
+            <a:pPr marL="0" indent="0">
               <a:buNone/>
             </a:pPr>
             <a:r>
@@ -16462,7 +16205,7 @@
           <a:bodyPr wrap="square" lIns="0" tIns="0" rIns="0" bIns="0" rtlCol="0" anchor="ctr"/>
           <a:lstStyle/>
           <a:p>
-            <a:pPr indent="0" marL="0">
+            <a:pPr marL="0" indent="0">
               <a:buNone/>
             </a:pPr>
             <a:r>
@@ -16501,7 +16244,7 @@
           <a:bodyPr wrap="square" lIns="0" tIns="0" rIns="0" bIns="0" rtlCol="0" anchor="ctr"/>
           <a:lstStyle/>
           <a:p>
-            <a:pPr indent="0" marL="0">
+            <a:pPr marL="0" indent="0">
               <a:buNone/>
             </a:pPr>
             <a:r>
@@ -16540,7 +16283,7 @@
           <a:bodyPr wrap="square" lIns="0" tIns="0" rIns="0" bIns="0" rtlCol="0" anchor="ctr"/>
           <a:lstStyle/>
           <a:p>
-            <a:pPr indent="0" marL="0">
+            <a:pPr marL="0" indent="0">
               <a:buNone/>
             </a:pPr>
             <a:r>
@@ -16604,7 +16347,7 @@
           <a:bodyPr wrap="square" lIns="0" tIns="0" rIns="0" bIns="0" rtlCol="0" anchor="ctr"/>
           <a:lstStyle/>
           <a:p>
-            <a:pPr indent="0" marL="0">
+            <a:pPr marL="0" indent="0">
               <a:buNone/>
             </a:pPr>
             <a:r>
@@ -16643,7 +16386,7 @@
           <a:bodyPr wrap="square" lIns="0" tIns="0" rIns="0" bIns="0" rtlCol="0" anchor="ctr"/>
           <a:lstStyle/>
           <a:p>
-            <a:pPr indent="0" marL="0">
+            <a:pPr marL="0" indent="0">
               <a:buNone/>
             </a:pPr>
             <a:r>
@@ -16707,7 +16450,7 @@
           <a:bodyPr wrap="square" lIns="0" tIns="0" rIns="0" bIns="0" rtlCol="0" anchor="ctr"/>
           <a:lstStyle/>
           <a:p>
-            <a:pPr indent="0" marL="0">
+            <a:pPr marL="0" indent="0">
               <a:buNone/>
             </a:pPr>
             <a:r>
@@ -16741,6 +16484,7 @@
         <a:solidFill>
           <a:srgbClr val="F8FAFB"/>
         </a:solidFill>
+        <a:effectLst/>
       </p:bgPr>
     </p:bg>
     <p:spTree>
@@ -16803,7 +16547,7 @@
           <a:bodyPr wrap="square" lIns="0" tIns="0" rIns="0" bIns="0" rtlCol="0" anchor="ctr"/>
           <a:lstStyle/>
           <a:p>
-            <a:pPr indent="0" marL="0">
+            <a:pPr marL="0" indent="0">
               <a:buNone/>
             </a:pPr>
             <a:r>
@@ -16842,7 +16586,7 @@
           <a:bodyPr wrap="square" lIns="0" tIns="0" rIns="0" bIns="0" rtlCol="0" anchor="ctr"/>
           <a:lstStyle/>
           <a:p>
-            <a:pPr indent="0" marL="0">
+            <a:pPr marL="0" indent="0">
               <a:buNone/>
             </a:pPr>
             <a:r>
@@ -16881,7 +16625,7 @@
           <a:bodyPr wrap="square" lIns="0" tIns="0" rIns="0" bIns="0" rtlCol="0" anchor="ctr"/>
           <a:lstStyle/>
           <a:p>
-            <a:pPr indent="0" marL="0">
+            <a:pPr marL="0" indent="0">
               <a:buNone/>
             </a:pPr>
             <a:r>
@@ -16923,7 +16667,7 @@
             <a:prstDash val="solid"/>
           </a:ln>
           <a:effectLst>
-            <a:outerShdw sx="100000" sy="100000" kx="0" ky="0" algn="bl" rotWithShape="0" blurRad="101600" dist="38100" dir="8100000">
+            <a:outerShdw blurRad="101600" dist="38100" dir="8100000" algn="bl" rotWithShape="0">
               <a:srgbClr val="9EAFC0">
                 <a:alpha val="14000"/>
               </a:srgbClr>
@@ -16977,7 +16721,7 @@
           <a:bodyPr wrap="square" lIns="0" tIns="0" rIns="0" bIns="0" rtlCol="0" anchor="ctr"/>
           <a:lstStyle/>
           <a:p>
-            <a:pPr indent="0" marL="0">
+            <a:pPr marL="0" indent="0">
               <a:buNone/>
             </a:pPr>
             <a:r>
@@ -17016,7 +16760,7 @@
           <a:bodyPr wrap="square" lIns="0" tIns="0" rIns="0" bIns="0" rtlCol="0" anchor="ctr"/>
           <a:lstStyle/>
           <a:p>
-            <a:pPr indent="0" marL="0">
+            <a:pPr marL="0" indent="0">
               <a:buNone/>
             </a:pPr>
             <a:r>
@@ -17080,7 +16824,7 @@
           <a:bodyPr wrap="square" lIns="0" tIns="0" rIns="0" bIns="0" rtlCol="0" anchor="ctr"/>
           <a:lstStyle/>
           <a:p>
-            <a:pPr indent="0" marL="0">
+            <a:pPr marL="0" indent="0">
               <a:buNone/>
             </a:pPr>
             <a:r>
@@ -17119,7 +16863,7 @@
           <a:bodyPr wrap="square" lIns="0" tIns="0" rIns="0" bIns="0" rtlCol="0" anchor="ctr"/>
           <a:lstStyle/>
           <a:p>
-            <a:pPr indent="0" marL="0">
+            <a:pPr marL="0" indent="0">
               <a:buNone/>
             </a:pPr>
             <a:r>
@@ -17161,7 +16905,7 @@
             <a:prstDash val="solid"/>
           </a:ln>
           <a:effectLst>
-            <a:outerShdw sx="100000" sy="100000" kx="0" ky="0" algn="bl" rotWithShape="0" blurRad="101600" dist="38100" dir="8100000">
+            <a:outerShdw blurRad="101600" dist="38100" dir="8100000" algn="bl" rotWithShape="0">
               <a:srgbClr val="9EAFC0">
                 <a:alpha val="14000"/>
               </a:srgbClr>
@@ -17215,7 +16959,7 @@
           <a:bodyPr wrap="square" lIns="0" tIns="0" rIns="0" bIns="0" rtlCol="0" anchor="ctr"/>
           <a:lstStyle/>
           <a:p>
-            <a:pPr indent="0" marL="0">
+            <a:pPr marL="0" indent="0">
               <a:buNone/>
             </a:pPr>
             <a:r>
@@ -17254,7 +16998,7 @@
           <a:bodyPr wrap="square" lIns="0" tIns="0" rIns="0" bIns="0" rtlCol="0" anchor="ctr"/>
           <a:lstStyle/>
           <a:p>
-            <a:pPr indent="0" marL="0">
+            <a:pPr marL="0" indent="0">
               <a:buNone/>
             </a:pPr>
             <a:r>
@@ -17318,7 +17062,7 @@
           <a:bodyPr wrap="square" lIns="0" tIns="0" rIns="0" bIns="0" rtlCol="0" anchor="ctr"/>
           <a:lstStyle/>
           <a:p>
-            <a:pPr indent="0" marL="0">
+            <a:pPr marL="0" indent="0">
               <a:buNone/>
             </a:pPr>
             <a:r>
@@ -17357,7 +17101,7 @@
           <a:bodyPr wrap="square" lIns="0" tIns="0" rIns="0" bIns="0" rtlCol="0" anchor="ctr"/>
           <a:lstStyle/>
           <a:p>
-            <a:pPr indent="0" marL="0">
+            <a:pPr marL="0" indent="0">
               <a:buNone/>
             </a:pPr>
             <a:r>
@@ -17399,7 +17143,7 @@
             <a:prstDash val="solid"/>
           </a:ln>
           <a:effectLst>
-            <a:outerShdw sx="100000" sy="100000" kx="0" ky="0" algn="bl" rotWithShape="0" blurRad="101600" dist="38100" dir="8100000">
+            <a:outerShdw blurRad="101600" dist="38100" dir="8100000" algn="bl" rotWithShape="0">
               <a:srgbClr val="9EAFC0">
                 <a:alpha val="14000"/>
               </a:srgbClr>
@@ -17453,7 +17197,7 @@
           <a:bodyPr wrap="square" lIns="0" tIns="0" rIns="0" bIns="0" rtlCol="0" anchor="ctr"/>
           <a:lstStyle/>
           <a:p>
-            <a:pPr indent="0" marL="0">
+            <a:pPr marL="0" indent="0">
               <a:buNone/>
             </a:pPr>
             <a:r>
@@ -17492,7 +17236,7 @@
           <a:bodyPr wrap="square" lIns="0" tIns="0" rIns="0" bIns="0" rtlCol="0" anchor="ctr"/>
           <a:lstStyle/>
           <a:p>
-            <a:pPr indent="0" marL="0">
+            <a:pPr marL="0" indent="0">
               <a:buNone/>
             </a:pPr>
             <a:r>
@@ -17556,7 +17300,7 @@
           <a:bodyPr wrap="square" lIns="0" tIns="0" rIns="0" bIns="0" rtlCol="0" anchor="ctr"/>
           <a:lstStyle/>
           <a:p>
-            <a:pPr indent="0" marL="0">
+            <a:pPr marL="0" indent="0">
               <a:buNone/>
             </a:pPr>
             <a:r>
@@ -17595,7 +17339,7 @@
           <a:bodyPr wrap="square" lIns="0" tIns="0" rIns="0" bIns="0" rtlCol="0" anchor="ctr"/>
           <a:lstStyle/>
           <a:p>
-            <a:pPr indent="0" marL="0">
+            <a:pPr marL="0" indent="0">
               <a:buNone/>
             </a:pPr>
             <a:r>
@@ -17637,7 +17381,7 @@
             <a:prstDash val="solid"/>
           </a:ln>
           <a:effectLst>
-            <a:outerShdw sx="100000" sy="100000" kx="0" ky="0" algn="bl" rotWithShape="0" blurRad="101600" dist="38100" dir="8100000">
+            <a:outerShdw blurRad="101600" dist="38100" dir="8100000" algn="bl" rotWithShape="0">
               <a:srgbClr val="9EAFC0">
                 <a:alpha val="14000"/>
               </a:srgbClr>
@@ -17691,7 +17435,7 @@
           <a:bodyPr wrap="square" lIns="0" tIns="0" rIns="0" bIns="0" rtlCol="0" anchor="ctr"/>
           <a:lstStyle/>
           <a:p>
-            <a:pPr indent="0" marL="0">
+            <a:pPr marL="0" indent="0">
               <a:buNone/>
             </a:pPr>
             <a:r>
@@ -17730,7 +17474,7 @@
           <a:bodyPr wrap="square" lIns="0" tIns="0" rIns="0" bIns="0" rtlCol="0" anchor="ctr"/>
           <a:lstStyle/>
           <a:p>
-            <a:pPr indent="0" marL="0">
+            <a:pPr marL="0" indent="0">
               <a:buNone/>
             </a:pPr>
             <a:r>
@@ -17794,7 +17538,7 @@
           <a:bodyPr wrap="square" lIns="0" tIns="0" rIns="0" bIns="0" rtlCol="0" anchor="ctr"/>
           <a:lstStyle/>
           <a:p>
-            <a:pPr indent="0" marL="0">
+            <a:pPr marL="0" indent="0">
               <a:buNone/>
             </a:pPr>
             <a:r>
@@ -17833,7 +17577,7 @@
           <a:bodyPr wrap="square" lIns="0" tIns="0" rIns="0" bIns="0" rtlCol="0" anchor="ctr"/>
           <a:lstStyle/>
           <a:p>
-            <a:pPr indent="0" marL="0">
+            <a:pPr marL="0" indent="0">
               <a:buNone/>
             </a:pPr>
             <a:r>
@@ -17875,7 +17619,7 @@
             <a:prstDash val="solid"/>
           </a:ln>
           <a:effectLst>
-            <a:outerShdw sx="100000" sy="100000" kx="0" ky="0" algn="bl" rotWithShape="0" blurRad="101600" dist="38100" dir="8100000">
+            <a:outerShdw blurRad="101600" dist="38100" dir="8100000" algn="bl" rotWithShape="0">
               <a:srgbClr val="9EAFC0">
                 <a:alpha val="14000"/>
               </a:srgbClr>
@@ -17929,7 +17673,7 @@
           <a:bodyPr wrap="square" lIns="0" tIns="0" rIns="0" bIns="0" rtlCol="0" anchor="ctr"/>
           <a:lstStyle/>
           <a:p>
-            <a:pPr indent="0" marL="0">
+            <a:pPr marL="0" indent="0">
               <a:buNone/>
             </a:pPr>
             <a:r>
@@ -17968,7 +17712,7 @@
           <a:bodyPr wrap="square" lIns="0" tIns="0" rIns="0" bIns="0" rtlCol="0" anchor="ctr"/>
           <a:lstStyle/>
           <a:p>
-            <a:pPr indent="0" marL="0">
+            <a:pPr marL="0" indent="0">
               <a:buNone/>
             </a:pPr>
             <a:r>
@@ -18032,7 +17776,7 @@
           <a:bodyPr wrap="square" lIns="0" tIns="0" rIns="0" bIns="0" rtlCol="0" anchor="ctr"/>
           <a:lstStyle/>
           <a:p>
-            <a:pPr indent="0" marL="0">
+            <a:pPr marL="0" indent="0">
               <a:buNone/>
             </a:pPr>
             <a:r>
@@ -18071,7 +17815,7 @@
           <a:bodyPr wrap="square" lIns="0" tIns="0" rIns="0" bIns="0" rtlCol="0" anchor="ctr"/>
           <a:lstStyle/>
           <a:p>
-            <a:pPr indent="0" marL="0">
+            <a:pPr marL="0" indent="0">
               <a:buNone/>
             </a:pPr>
             <a:r>
@@ -18113,7 +17857,7 @@
             <a:prstDash val="solid"/>
           </a:ln>
           <a:effectLst>
-            <a:outerShdw sx="100000" sy="100000" kx="0" ky="0" algn="bl" rotWithShape="0" blurRad="101600" dist="38100" dir="8100000">
+            <a:outerShdw blurRad="101600" dist="38100" dir="8100000" algn="bl" rotWithShape="0">
               <a:srgbClr val="9EAFC0">
                 <a:alpha val="14000"/>
               </a:srgbClr>
@@ -18167,7 +17911,7 @@
           <a:bodyPr wrap="square" lIns="0" tIns="0" rIns="0" bIns="0" rtlCol="0" anchor="ctr"/>
           <a:lstStyle/>
           <a:p>
-            <a:pPr indent="0" marL="0">
+            <a:pPr marL="0" indent="0">
               <a:buNone/>
             </a:pPr>
             <a:r>
@@ -18206,7 +17950,7 @@
           <a:bodyPr wrap="square" lIns="0" tIns="0" rIns="0" bIns="0" rtlCol="0" anchor="ctr"/>
           <a:lstStyle/>
           <a:p>
-            <a:pPr indent="0" marL="0">
+            <a:pPr marL="0" indent="0">
               <a:buNone/>
             </a:pPr>
             <a:r>
@@ -18270,7 +18014,7 @@
           <a:bodyPr wrap="square" lIns="0" tIns="0" rIns="0" bIns="0" rtlCol="0" anchor="ctr"/>
           <a:lstStyle/>
           <a:p>
-            <a:pPr indent="0" marL="0">
+            <a:pPr marL="0" indent="0">
               <a:buNone/>
             </a:pPr>
             <a:r>
@@ -18309,7 +18053,7 @@
           <a:bodyPr wrap="square" lIns="0" tIns="0" rIns="0" bIns="0" rtlCol="0" anchor="ctr"/>
           <a:lstStyle/>
           <a:p>
-            <a:pPr indent="0" marL="0">
+            <a:pPr marL="0" indent="0">
               <a:buNone/>
             </a:pPr>
             <a:r>
@@ -18373,7 +18117,7 @@
           <a:bodyPr wrap="square" lIns="0" tIns="0" rIns="0" bIns="0" rtlCol="0" anchor="ctr"/>
           <a:lstStyle/>
           <a:p>
-            <a:pPr indent="0" marL="0">
+            <a:pPr marL="0" indent="0">
               <a:buNone/>
             </a:pPr>
             <a:r>
@@ -18692,4 +18436,319 @@
     </a:ext>
   </a:extLst>
 </a:theme>
+</file>
+
+<file path=ppt/theme/theme2.xml><?xml version="1.0" encoding="utf-8"?>
+<a:theme xmlns:a="http://schemas.openxmlformats.org/drawingml/2006/main" name="Office Theme">
+  <a:themeElements>
+    <a:clrScheme name="Office">
+      <a:dk1>
+        <a:sysClr val="windowText" lastClr="000000"/>
+      </a:dk1>
+      <a:lt1>
+        <a:sysClr val="window" lastClr="FFFFFF"/>
+      </a:lt1>
+      <a:dk2>
+        <a:srgbClr val="0E2841"/>
+      </a:dk2>
+      <a:lt2>
+        <a:srgbClr val="E8E8E8"/>
+      </a:lt2>
+      <a:accent1>
+        <a:srgbClr val="156082"/>
+      </a:accent1>
+      <a:accent2>
+        <a:srgbClr val="E97132"/>
+      </a:accent2>
+      <a:accent3>
+        <a:srgbClr val="196B24"/>
+      </a:accent3>
+      <a:accent4>
+        <a:srgbClr val="0F9ED5"/>
+      </a:accent4>
+      <a:accent5>
+        <a:srgbClr val="A02B93"/>
+      </a:accent5>
+      <a:accent6>
+        <a:srgbClr val="4EA72E"/>
+      </a:accent6>
+      <a:hlink>
+        <a:srgbClr val="467886"/>
+      </a:hlink>
+      <a:folHlink>
+        <a:srgbClr val="96607D"/>
+      </a:folHlink>
+    </a:clrScheme>
+    <a:fontScheme name="Office">
+      <a:majorFont>
+        <a:latin typeface="Aptos Display" panose="02110004020202020204"/>
+        <a:ea typeface=""/>
+        <a:cs typeface=""/>
+        <a:font script="Jpan" typeface="游ゴシック Light"/>
+        <a:font script="Hang" typeface="맑은 고딕"/>
+        <a:font script="Hans" typeface="等线 Light"/>
+        <a:font script="Hant" typeface="新細明體"/>
+        <a:font script="Arab" typeface="Times New Roman"/>
+        <a:font script="Hebr" typeface="Times New Roman"/>
+        <a:font script="Thai" typeface="Angsana New"/>
+        <a:font script="Ethi" typeface="Nyala"/>
+        <a:font script="Beng" typeface="Vrinda"/>
+        <a:font script="Gujr" typeface="Shruti"/>
+        <a:font script="Khmr" typeface="MoolBoran"/>
+        <a:font script="Knda" typeface="Tunga"/>
+        <a:font script="Guru" typeface="Raavi"/>
+        <a:font script="Cans" typeface="Euphemia"/>
+        <a:font script="Cher" typeface="Plantagenet Cherokee"/>
+        <a:font script="Yiii" typeface="Microsoft Yi Baiti"/>
+        <a:font script="Tibt" typeface="Microsoft Himalaya"/>
+        <a:font script="Thaa" typeface="MV Boli"/>
+        <a:font script="Deva" typeface="Mangal"/>
+        <a:font script="Telu" typeface="Gautami"/>
+        <a:font script="Taml" typeface="Latha"/>
+        <a:font script="Syrc" typeface="Estrangelo Edessa"/>
+        <a:font script="Orya" typeface="Kalinga"/>
+        <a:font script="Mlym" typeface="Kartika"/>
+        <a:font script="Laoo" typeface="DokChampa"/>
+        <a:font script="Sinh" typeface="Iskoola Pota"/>
+        <a:font script="Mong" typeface="Mongolian Baiti"/>
+        <a:font script="Viet" typeface="Times New Roman"/>
+        <a:font script="Uigh" typeface="Microsoft Uighur"/>
+        <a:font script="Geor" typeface="Sylfaen"/>
+        <a:font script="Armn" typeface="Arial"/>
+        <a:font script="Bugi" typeface="Leelawadee UI"/>
+        <a:font script="Bopo" typeface="Microsoft JhengHei"/>
+        <a:font script="Java" typeface="Javanese Text"/>
+        <a:font script="Lisu" typeface="Segoe UI"/>
+        <a:font script="Mymr" typeface="Myanmar Text"/>
+        <a:font script="Nkoo" typeface="Ebrima"/>
+        <a:font script="Olck" typeface="Nirmala UI"/>
+        <a:font script="Osma" typeface="Ebrima"/>
+        <a:font script="Phag" typeface="Phagspa"/>
+        <a:font script="Syrn" typeface="Estrangelo Edessa"/>
+        <a:font script="Syrj" typeface="Estrangelo Edessa"/>
+        <a:font script="Syre" typeface="Estrangelo Edessa"/>
+        <a:font script="Sora" typeface="Nirmala UI"/>
+        <a:font script="Tale" typeface="Microsoft Tai Le"/>
+        <a:font script="Talu" typeface="Microsoft New Tai Lue"/>
+        <a:font script="Tfng" typeface="Ebrima"/>
+      </a:majorFont>
+      <a:minorFont>
+        <a:latin typeface="Aptos" panose="02110004020202020204"/>
+        <a:ea typeface=""/>
+        <a:cs typeface=""/>
+        <a:font script="Jpan" typeface="游ゴシック"/>
+        <a:font script="Hang" typeface="맑은 고딕"/>
+        <a:font script="Hans" typeface="等线"/>
+        <a:font script="Hant" typeface="新細明體"/>
+        <a:font script="Arab" typeface="Arial"/>
+        <a:font script="Hebr" typeface="Arial"/>
+        <a:font script="Thai" typeface="Cordia New"/>
+        <a:font script="Ethi" typeface="Nyala"/>
+        <a:font script="Beng" typeface="Vrinda"/>
+        <a:font script="Gujr" typeface="Shruti"/>
+        <a:font script="Khmr" typeface="DaunPenh"/>
+        <a:font script="Knda" typeface="Tunga"/>
+        <a:font script="Guru" typeface="Raavi"/>
+        <a:font script="Cans" typeface="Euphemia"/>
+        <a:font script="Cher" typeface="Plantagenet Cherokee"/>
+        <a:font script="Yiii" typeface="Microsoft Yi Baiti"/>
+        <a:font script="Tibt" typeface="Microsoft Himalaya"/>
+        <a:font script="Thaa" typeface="MV Boli"/>
+        <a:font script="Deva" typeface="Mangal"/>
+        <a:font script="Telu" typeface="Gautami"/>
+        <a:font script="Taml" typeface="Latha"/>
+        <a:font script="Syrc" typeface="Estrangelo Edessa"/>
+        <a:font script="Orya" typeface="Kalinga"/>
+        <a:font script="Mlym" typeface="Kartika"/>
+        <a:font script="Laoo" typeface="DokChampa"/>
+        <a:font script="Sinh" typeface="Iskoola Pota"/>
+        <a:font script="Mong" typeface="Mongolian Baiti"/>
+        <a:font script="Viet" typeface="Arial"/>
+        <a:font script="Uigh" typeface="Microsoft Uighur"/>
+        <a:font script="Geor" typeface="Sylfaen"/>
+        <a:font script="Armn" typeface="Arial"/>
+        <a:font script="Bugi" typeface="Leelawadee UI"/>
+        <a:font script="Bopo" typeface="Microsoft JhengHei"/>
+        <a:font script="Java" typeface="Javanese Text"/>
+        <a:font script="Lisu" typeface="Segoe UI"/>
+        <a:font script="Mymr" typeface="Myanmar Text"/>
+        <a:font script="Nkoo" typeface="Ebrima"/>
+        <a:font script="Olck" typeface="Nirmala UI"/>
+        <a:font script="Osma" typeface="Ebrima"/>
+        <a:font script="Phag" typeface="Phagspa"/>
+        <a:font script="Syrn" typeface="Estrangelo Edessa"/>
+        <a:font script="Syrj" typeface="Estrangelo Edessa"/>
+        <a:font script="Syre" typeface="Estrangelo Edessa"/>
+        <a:font script="Sora" typeface="Nirmala UI"/>
+        <a:font script="Tale" typeface="Microsoft Tai Le"/>
+        <a:font script="Talu" typeface="Microsoft New Tai Lue"/>
+        <a:font script="Tfng" typeface="Ebrima"/>
+      </a:minorFont>
+    </a:fontScheme>
+    <a:fmtScheme name="Office">
+      <a:fillStyleLst>
+        <a:solidFill>
+          <a:schemeClr val="phClr"/>
+        </a:solidFill>
+        <a:gradFill rotWithShape="1">
+          <a:gsLst>
+            <a:gs pos="0">
+              <a:schemeClr val="phClr">
+                <a:lumMod val="110000"/>
+                <a:satMod val="105000"/>
+                <a:tint val="67000"/>
+              </a:schemeClr>
+            </a:gs>
+            <a:gs pos="50000">
+              <a:schemeClr val="phClr">
+                <a:lumMod val="105000"/>
+                <a:satMod val="103000"/>
+                <a:tint val="73000"/>
+              </a:schemeClr>
+            </a:gs>
+            <a:gs pos="100000">
+              <a:schemeClr val="phClr">
+                <a:lumMod val="105000"/>
+                <a:satMod val="109000"/>
+                <a:tint val="81000"/>
+              </a:schemeClr>
+            </a:gs>
+          </a:gsLst>
+          <a:lin ang="5400000" scaled="0"/>
+        </a:gradFill>
+        <a:gradFill rotWithShape="1">
+          <a:gsLst>
+            <a:gs pos="0">
+              <a:schemeClr val="phClr">
+                <a:satMod val="103000"/>
+                <a:lumMod val="102000"/>
+                <a:tint val="94000"/>
+              </a:schemeClr>
+            </a:gs>
+            <a:gs pos="50000">
+              <a:schemeClr val="phClr">
+                <a:satMod val="110000"/>
+                <a:lumMod val="100000"/>
+                <a:shade val="100000"/>
+              </a:schemeClr>
+            </a:gs>
+            <a:gs pos="100000">
+              <a:schemeClr val="phClr">
+                <a:lumMod val="99000"/>
+                <a:satMod val="120000"/>
+                <a:shade val="78000"/>
+              </a:schemeClr>
+            </a:gs>
+          </a:gsLst>
+          <a:lin ang="5400000" scaled="0"/>
+        </a:gradFill>
+      </a:fillStyleLst>
+      <a:lnStyleLst>
+        <a:ln w="12700" cap="flat" cmpd="sng" algn="ctr">
+          <a:solidFill>
+            <a:schemeClr val="phClr"/>
+          </a:solidFill>
+          <a:prstDash val="solid"/>
+          <a:miter lim="800000"/>
+        </a:ln>
+        <a:ln w="19050" cap="flat" cmpd="sng" algn="ctr">
+          <a:solidFill>
+            <a:schemeClr val="phClr"/>
+          </a:solidFill>
+          <a:prstDash val="solid"/>
+          <a:miter lim="800000"/>
+        </a:ln>
+        <a:ln w="25400" cap="flat" cmpd="sng" algn="ctr">
+          <a:solidFill>
+            <a:schemeClr val="phClr"/>
+          </a:solidFill>
+          <a:prstDash val="solid"/>
+          <a:miter lim="800000"/>
+        </a:ln>
+      </a:lnStyleLst>
+      <a:effectStyleLst>
+        <a:effectStyle>
+          <a:effectLst/>
+        </a:effectStyle>
+        <a:effectStyle>
+          <a:effectLst/>
+        </a:effectStyle>
+        <a:effectStyle>
+          <a:effectLst>
+            <a:outerShdw blurRad="57150" dist="19050" dir="5400000" algn="ctr" rotWithShape="0">
+              <a:srgbClr val="000000">
+                <a:alpha val="63000"/>
+              </a:srgbClr>
+            </a:outerShdw>
+          </a:effectLst>
+        </a:effectStyle>
+      </a:effectStyleLst>
+      <a:bgFillStyleLst>
+        <a:solidFill>
+          <a:schemeClr val="phClr"/>
+        </a:solidFill>
+        <a:solidFill>
+          <a:schemeClr val="phClr">
+            <a:tint val="95000"/>
+            <a:satMod val="170000"/>
+          </a:schemeClr>
+        </a:solidFill>
+        <a:gradFill rotWithShape="1">
+          <a:gsLst>
+            <a:gs pos="0">
+              <a:schemeClr val="phClr">
+                <a:tint val="93000"/>
+                <a:satMod val="150000"/>
+                <a:shade val="98000"/>
+                <a:lumMod val="102000"/>
+              </a:schemeClr>
+            </a:gs>
+            <a:gs pos="50000">
+              <a:schemeClr val="phClr">
+                <a:tint val="98000"/>
+                <a:satMod val="130000"/>
+                <a:shade val="90000"/>
+                <a:lumMod val="103000"/>
+              </a:schemeClr>
+            </a:gs>
+            <a:gs pos="100000">
+              <a:schemeClr val="phClr">
+                <a:shade val="63000"/>
+                <a:satMod val="120000"/>
+              </a:schemeClr>
+            </a:gs>
+          </a:gsLst>
+          <a:lin ang="5400000" scaled="0"/>
+        </a:gradFill>
+      </a:bgFillStyleLst>
+    </a:fmtScheme>
+  </a:themeElements>
+  <a:objectDefaults>
+    <a:lnDef>
+      <a:spPr/>
+      <a:bodyPr/>
+      <a:lstStyle/>
+      <a:style>
+        <a:lnRef idx="2">
+          <a:schemeClr val="accent1"/>
+        </a:lnRef>
+        <a:fillRef idx="0">
+          <a:schemeClr val="accent1"/>
+        </a:fillRef>
+        <a:effectRef idx="1">
+          <a:schemeClr val="accent1"/>
+        </a:effectRef>
+        <a:fontRef idx="minor">
+          <a:schemeClr val="tx1"/>
+        </a:fontRef>
+      </a:style>
+    </a:lnDef>
+  </a:objectDefaults>
+  <a:extraClrSchemeLst/>
+  <a:extLst>
+    <a:ext uri="{05A4C25C-085E-4340-85A3-A5531E510DB2}">
+      <thm15:themeFamily xmlns:thm15="http://schemas.microsoft.com/office/thememl/2012/main" name="Office Theme" id="{2E142A2C-CD16-42D6-873A-C26D2A0506FA}" vid="{1BDDFF52-6CD6-40A5-AB3C-68EB2F1E4D0A}"/>
+    </a:ext>
+  </a:extLst>
+</a:theme>
 </file>
--- a/Clase_1/PPT/clase_1.pptx
+++ b/Clase_1/PPT/clase_1.pptx
@@ -15168,7 +15168,7 @@
         </p:nvSpPr>
         <p:spPr>
           <a:xfrm>
-            <a:off x="4645152" y="3419856"/>
+            <a:off x="4617720" y="3438144"/>
             <a:ext cx="4069080" cy="502920"/>
           </a:xfrm>
           <a:prstGeom prst="rect">
@@ -15727,7 +15727,7 @@
         </p:nvSpPr>
         <p:spPr>
           <a:xfrm>
-            <a:off x="320040" y="1691640"/>
+            <a:off x="274320" y="1709928"/>
             <a:ext cx="4069080" cy="2542032"/>
           </a:xfrm>
           <a:prstGeom prst="rect">
